--- a/SecurePassPresentation.pptx
+++ b/SecurePassPresentation.pptx
@@ -7,6 +7,9 @@
   <p:notesMasterIdLst>
     <p:notesMasterId r:id="rId14"/>
   </p:notesMasterIdLst>
+  <p:handoutMasterIdLst>
+    <p:handoutMasterId r:id="rId15"/>
+  </p:handoutMasterIdLst>
   <p:sldIdLst>
     <p:sldId id="256" r:id="rId2"/>
     <p:sldId id="257" r:id="rId3"/>
@@ -118,7 +121,202 @@
       </a:defRPr>
     </a:lvl9pPr>
   </p:defaultTextStyle>
+  <p:extLst>
+    <p:ext uri="{EFAFB233-063F-42B5-8137-9DF3F51BA10A}">
+      <p15:sldGuideLst xmlns:p15="http://schemas.microsoft.com/office/powerpoint/2012/main"/>
+    </p:ext>
+  </p:extLst>
 </p:presentation>
+</file>
+
+<file path=ppt/handoutMasters/handoutMaster1.xml><?xml version="1.0" encoding="utf-8"?>
+<p:handoutMaster xmlns:a="http://schemas.openxmlformats.org/drawingml/2006/main" xmlns:r="http://schemas.openxmlformats.org/officeDocument/2006/relationships" xmlns:p="http://schemas.openxmlformats.org/presentationml/2006/main">
+  <p:cSld>
+    <p:bg>
+      <p:bgRef idx="1001">
+        <a:schemeClr val="bg1"/>
+      </p:bgRef>
+    </p:bg>
+    <p:spTree>
+      <p:nvGrpSpPr>
+        <p:cNvPr id="1" name=""/>
+        <p:cNvGrpSpPr/>
+        <p:nvPr/>
+      </p:nvGrpSpPr>
+      <p:grpSpPr>
+        <a:xfrm>
+          <a:off x="0" y="0"/>
+          <a:ext cx="0" cy="0"/>
+          <a:chOff x="0" y="0"/>
+          <a:chExt cx="0" cy="0"/>
+        </a:xfrm>
+      </p:grpSpPr>
+      <p:sp>
+        <p:nvSpPr>
+          <p:cNvPr id="2" name="Header Placeholder 1">
+            <a:extLst>
+              <a:ext uri="{FF2B5EF4-FFF2-40B4-BE49-F238E27FC236}">
+                <a16:creationId xmlns:a16="http://schemas.microsoft.com/office/drawing/2014/main" id="{220A4E17-7827-0D59-1E86-9923A98BA88E}"/>
+              </a:ext>
+            </a:extLst>
+          </p:cNvPr>
+          <p:cNvSpPr>
+            <a:spLocks noGrp="1"/>
+          </p:cNvSpPr>
+          <p:nvPr>
+            <p:ph type="hdr" sz="quarter"/>
+          </p:nvPr>
+        </p:nvSpPr>
+        <p:spPr>
+          <a:xfrm>
+            <a:off x="0" y="0"/>
+            <a:ext cx="2971800" cy="458788"/>
+          </a:xfrm>
+          <a:prstGeom prst="rect">
+            <a:avLst/>
+          </a:prstGeom>
+        </p:spPr>
+        <p:txBody>
+          <a:bodyPr vert="horz" lIns="91440" tIns="45720" rIns="91440" bIns="45720" rtlCol="0"/>
+          <a:lstStyle>
+            <a:lvl1pPr algn="l">
+              <a:defRPr sz="1200"/>
+            </a:lvl1pPr>
+          </a:lstStyle>
+          <a:p>
+            <a:endParaRPr lang="en-US"/>
+          </a:p>
+        </p:txBody>
+      </p:sp>
+      <p:sp>
+        <p:nvSpPr>
+          <p:cNvPr id="3" name="Date Placeholder 2">
+            <a:extLst>
+              <a:ext uri="{FF2B5EF4-FFF2-40B4-BE49-F238E27FC236}">
+                <a16:creationId xmlns:a16="http://schemas.microsoft.com/office/drawing/2014/main" id="{E02B879F-E6C1-D306-05CC-5782BDCB3C99}"/>
+              </a:ext>
+            </a:extLst>
+          </p:cNvPr>
+          <p:cNvSpPr>
+            <a:spLocks noGrp="1"/>
+          </p:cNvSpPr>
+          <p:nvPr>
+            <p:ph type="dt" sz="quarter" idx="1"/>
+          </p:nvPr>
+        </p:nvSpPr>
+        <p:spPr>
+          <a:xfrm>
+            <a:off x="3884613" y="0"/>
+            <a:ext cx="2971800" cy="458788"/>
+          </a:xfrm>
+          <a:prstGeom prst="rect">
+            <a:avLst/>
+          </a:prstGeom>
+        </p:spPr>
+        <p:txBody>
+          <a:bodyPr vert="horz" lIns="91440" tIns="45720" rIns="91440" bIns="45720" rtlCol="0"/>
+          <a:lstStyle>
+            <a:lvl1pPr algn="r">
+              <a:defRPr sz="1200"/>
+            </a:lvl1pPr>
+          </a:lstStyle>
+          <a:p>
+            <a:fld id="{F044046C-EF10-4B59-B4E7-8DC889B4A833}" type="datetimeFigureOut">
+              <a:rPr lang="en-US" smtClean="0"/>
+              <a:t>4/14/2026</a:t>
+            </a:fld>
+            <a:endParaRPr lang="en-US"/>
+          </a:p>
+        </p:txBody>
+      </p:sp>
+      <p:sp>
+        <p:nvSpPr>
+          <p:cNvPr id="4" name="Footer Placeholder 3">
+            <a:extLst>
+              <a:ext uri="{FF2B5EF4-FFF2-40B4-BE49-F238E27FC236}">
+                <a16:creationId xmlns:a16="http://schemas.microsoft.com/office/drawing/2014/main" id="{FC61FFDF-0336-1920-8F01-56CDDA166583}"/>
+              </a:ext>
+            </a:extLst>
+          </p:cNvPr>
+          <p:cNvSpPr>
+            <a:spLocks noGrp="1"/>
+          </p:cNvSpPr>
+          <p:nvPr>
+            <p:ph type="ftr" sz="quarter" idx="2"/>
+          </p:nvPr>
+        </p:nvSpPr>
+        <p:spPr>
+          <a:xfrm>
+            <a:off x="0" y="8685213"/>
+            <a:ext cx="2971800" cy="458787"/>
+          </a:xfrm>
+          <a:prstGeom prst="rect">
+            <a:avLst/>
+          </a:prstGeom>
+        </p:spPr>
+        <p:txBody>
+          <a:bodyPr vert="horz" lIns="91440" tIns="45720" rIns="91440" bIns="45720" rtlCol="0" anchor="b"/>
+          <a:lstStyle>
+            <a:lvl1pPr algn="l">
+              <a:defRPr sz="1200"/>
+            </a:lvl1pPr>
+          </a:lstStyle>
+          <a:p>
+            <a:endParaRPr lang="en-US"/>
+          </a:p>
+        </p:txBody>
+      </p:sp>
+      <p:sp>
+        <p:nvSpPr>
+          <p:cNvPr id="5" name="Slide Number Placeholder 4">
+            <a:extLst>
+              <a:ext uri="{FF2B5EF4-FFF2-40B4-BE49-F238E27FC236}">
+                <a16:creationId xmlns:a16="http://schemas.microsoft.com/office/drawing/2014/main" id="{DC2F022F-9B14-2089-5B94-903012544DF5}"/>
+              </a:ext>
+            </a:extLst>
+          </p:cNvPr>
+          <p:cNvSpPr>
+            <a:spLocks noGrp="1"/>
+          </p:cNvSpPr>
+          <p:nvPr>
+            <p:ph type="sldNum" sz="quarter" idx="3"/>
+          </p:nvPr>
+        </p:nvSpPr>
+        <p:spPr>
+          <a:xfrm>
+            <a:off x="3884613" y="8685213"/>
+            <a:ext cx="2971800" cy="458787"/>
+          </a:xfrm>
+          <a:prstGeom prst="rect">
+            <a:avLst/>
+          </a:prstGeom>
+        </p:spPr>
+        <p:txBody>
+          <a:bodyPr vert="horz" lIns="91440" tIns="45720" rIns="91440" bIns="45720" rtlCol="0" anchor="b"/>
+          <a:lstStyle>
+            <a:lvl1pPr algn="r">
+              <a:defRPr sz="1200"/>
+            </a:lvl1pPr>
+          </a:lstStyle>
+          <a:p>
+            <a:fld id="{FFC7CCD8-12D6-4D41-9006-8B8BF5D29ED7}" type="slidenum">
+              <a:rPr lang="en-US" smtClean="0"/>
+              <a:t>‹#›</a:t>
+            </a:fld>
+            <a:endParaRPr lang="en-US"/>
+          </a:p>
+        </p:txBody>
+      </p:sp>
+    </p:spTree>
+    <p:extLst>
+      <p:ext uri="{BB962C8B-B14F-4D97-AF65-F5344CB8AC3E}">
+        <p14:creationId xmlns:p14="http://schemas.microsoft.com/office/powerpoint/2010/main" val="1059924300"/>
+      </p:ext>
+    </p:extLst>
+  </p:cSld>
+  <p:clrMap bg1="lt1" tx1="dk1" bg2="lt2" tx2="dk2" accent1="accent1" accent2="accent2" accent3="accent3" accent4="accent4" accent5="accent5" accent6="accent6" hlink="hlink" folHlink="folHlink"/>
+  <p:hf hdr="0" ftr="0" dt="0"/>
+</p:handoutMaster>
 </file>
 
 <file path=ppt/notesMasters/notesMaster1.xml><?xml version="1.0" encoding="utf-8"?>
@@ -203,7 +401,7 @@
           <a:p>
             <a:fld id="{D60145E7-B66D-4946-A0AF-80F6A88D916A}" type="datetimeFigureOut">
               <a:rPr lang="en-US" smtClean="0"/>
-              <a:t>4/10/2026</a:t>
+              <a:t>4/14/2026</a:t>
             </a:fld>
             <a:endParaRPr lang="en-US"/>
           </a:p>
@@ -375,6 +573,7 @@
     </p:extLst>
   </p:cSld>
   <p:clrMap bg1="lt1" tx1="dk1" bg2="lt2" tx2="dk2" accent1="accent1" accent2="accent2" accent3="accent3" accent4="accent4" accent5="accent5" accent6="accent6" hlink="hlink" folHlink="folHlink"/>
+  <p:hf hdr="0" ftr="0" dt="0"/>
   <p:notesStyle>
     <a:lvl1pPr marL="0" algn="l" defTabSz="914400" rtl="0" eaLnBrk="1" latinLnBrk="0" hangingPunct="1">
       <a:defRPr sz="1200" kern="1200">
@@ -1601,9 +1800,9 @@
           <a:bodyPr/>
           <a:lstStyle/>
           <a:p>
-            <a:fld id="{C128FA71-3A18-48C0-980F-4B68F7F63042}" type="datetime1">
+            <a:fld id="{97F1F917-F1D2-4368-B437-39ED0419D90A}" type="datetime1">
               <a:rPr lang="en-US" smtClean="0"/>
-              <a:t>4/9/2026</a:t>
+              <a:t>4/14/2026</a:t>
             </a:fld>
             <a:endParaRPr lang="en-US"/>
           </a:p>
@@ -1809,9 +2008,9 @@
           <a:bodyPr/>
           <a:lstStyle/>
           <a:p>
-            <a:fld id="{7104EDB3-C0E8-45F8-9E1D-1B6C8D1880C0}" type="datetime1">
+            <a:fld id="{1B27D1D5-455E-457D-8D0F-6A8C6C817D3C}" type="datetime1">
               <a:rPr lang="en-US" smtClean="0"/>
-              <a:t>4/9/2026</a:t>
+              <a:t>4/14/2026</a:t>
             </a:fld>
             <a:endParaRPr lang="en-US"/>
           </a:p>
@@ -2019,9 +2218,9 @@
           <a:bodyPr/>
           <a:lstStyle/>
           <a:p>
-            <a:fld id="{9CF0EC4B-54ED-4041-B552-9BA760FA3DBA}" type="datetime1">
+            <a:fld id="{EA1EB783-BD1D-45B1-B1CF-F6BB17103F6A}" type="datetime1">
               <a:rPr lang="en-US" smtClean="0"/>
-              <a:t>4/9/2026</a:t>
+              <a:t>4/14/2026</a:t>
             </a:fld>
             <a:endParaRPr lang="en-US"/>
           </a:p>
@@ -2217,9 +2416,9 @@
           <a:bodyPr/>
           <a:lstStyle/>
           <a:p>
-            <a:fld id="{51C1210E-201E-4473-82AC-2466F5386C38}" type="datetime1">
+            <a:fld id="{AF8AB8F2-353A-4328-902B-9B06FEE5C754}" type="datetime1">
               <a:rPr lang="en-US" smtClean="0"/>
-              <a:t>4/9/2026</a:t>
+              <a:t>4/14/2026</a:t>
             </a:fld>
             <a:endParaRPr lang="en-US"/>
           </a:p>
@@ -2495,9 +2694,9 @@
           <a:bodyPr/>
           <a:lstStyle/>
           <a:p>
-            <a:fld id="{B01EA198-6CAB-4B8F-B93F-1F9C8C4B6CE7}" type="datetime1">
+            <a:fld id="{485487AD-62F7-470B-B759-97972E7321D1}" type="datetime1">
               <a:rPr lang="en-US" smtClean="0"/>
-              <a:t>4/9/2026</a:t>
+              <a:t>4/14/2026</a:t>
             </a:fld>
             <a:endParaRPr lang="en-US"/>
           </a:p>
@@ -2767,9 +2966,9 @@
           <a:bodyPr/>
           <a:lstStyle/>
           <a:p>
-            <a:fld id="{CA06041F-4525-44D5-AA4F-332294BF1F56}" type="datetime1">
+            <a:fld id="{B631FF32-A5EB-4C32-8C2B-8EEDFC04D47B}" type="datetime1">
               <a:rPr lang="en-US" smtClean="0"/>
-              <a:t>4/9/2026</a:t>
+              <a:t>4/14/2026</a:t>
             </a:fld>
             <a:endParaRPr lang="en-US"/>
           </a:p>
@@ -3191,9 +3390,9 @@
           <a:bodyPr/>
           <a:lstStyle/>
           <a:p>
-            <a:fld id="{F9557091-BBDF-4EB9-BA6B-2BB67AC4FC0F}" type="datetime1">
+            <a:fld id="{1AEBAB30-FBA6-42BA-A32F-C0FE7795CA04}" type="datetime1">
               <a:rPr lang="en-US" smtClean="0"/>
-              <a:t>4/9/2026</a:t>
+              <a:t>4/14/2026</a:t>
             </a:fld>
             <a:endParaRPr lang="en-US"/>
           </a:p>
@@ -3332,9 +3531,9 @@
           <a:bodyPr/>
           <a:lstStyle/>
           <a:p>
-            <a:fld id="{2D6B226B-77A6-410C-9796-083F278E0125}" type="datetime1">
+            <a:fld id="{D1AC0BD7-C524-41AC-85A7-2FDDB158F708}" type="datetime1">
               <a:rPr lang="en-US" smtClean="0"/>
-              <a:t>4/9/2026</a:t>
+              <a:t>4/14/2026</a:t>
             </a:fld>
             <a:endParaRPr lang="en-US"/>
           </a:p>
@@ -3445,9 +3644,9 @@
           <a:bodyPr/>
           <a:lstStyle/>
           <a:p>
-            <a:fld id="{A23A578B-D289-4C40-8593-3D356C49DA58}" type="datetime1">
+            <a:fld id="{1F8ABA9B-7E3B-4598-B288-B25DC329D124}" type="datetime1">
               <a:rPr lang="en-US" smtClean="0"/>
-              <a:t>4/9/2026</a:t>
+              <a:t>4/14/2026</a:t>
             </a:fld>
             <a:endParaRPr lang="en-US"/>
           </a:p>
@@ -3764,9 +3963,9 @@
           <a:bodyPr/>
           <a:lstStyle/>
           <a:p>
-            <a:fld id="{713DFAE3-14DB-48A7-A80F-80DDB072CE3D}" type="datetime1">
+            <a:fld id="{B8C1C246-3509-4124-8406-573BEC556487}" type="datetime1">
               <a:rPr lang="en-US" smtClean="0"/>
-              <a:t>4/9/2026</a:t>
+              <a:t>4/14/2026</a:t>
             </a:fld>
             <a:endParaRPr lang="en-US"/>
           </a:p>
@@ -4058,9 +4257,9 @@
           <a:bodyPr/>
           <a:lstStyle/>
           <a:p>
-            <a:fld id="{92C5EAEF-6478-4102-8F5D-A5FE9FC97ACB}" type="datetime1">
+            <a:fld id="{CA8B7CE8-0FD0-4622-A7A3-6D131820354D}" type="datetime1">
               <a:rPr lang="en-US" smtClean="0"/>
-              <a:t>4/9/2026</a:t>
+              <a:t>4/14/2026</a:t>
             </a:fld>
             <a:endParaRPr lang="en-US"/>
           </a:p>
@@ -4299,9 +4498,9 @@
             </a:lvl1pPr>
           </a:lstStyle>
           <a:p>
-            <a:fld id="{67F45AC6-C491-4585-A584-9CE2AF7D5500}" type="datetime1">
+            <a:fld id="{D0B3907D-BD88-4643-B5C3-64FBDE2F82C2}" type="datetime1">
               <a:rPr lang="en-US" smtClean="0"/>
-              <a:t>4/9/2026</a:t>
+              <a:t>4/14/2026</a:t>
             </a:fld>
             <a:endParaRPr lang="en-US"/>
           </a:p>
@@ -4414,7 +4613,7 @@
     <p:sldLayoutId id="2147483755" r:id="rId10"/>
     <p:sldLayoutId id="2147483757" r:id="rId11"/>
   </p:sldLayoutIdLst>
-  <p:hf sldNum="0" hdr="0" ftr="0" dt="0"/>
+  <p:hf hdr="0" ftr="0" dt="0"/>
   <p:txStyles>
     <p:titleStyle>
       <a:lvl1pPr algn="l" defTabSz="914400" rtl="0" eaLnBrk="1" latinLnBrk="0" hangingPunct="1">
@@ -4976,6 +5175,35 @@
           </a:p>
         </p:txBody>
       </p:sp>
+      <p:sp>
+        <p:nvSpPr>
+          <p:cNvPr id="4" name="Slide Number Placeholder 3">
+            <a:extLst>
+              <a:ext uri="{FF2B5EF4-FFF2-40B4-BE49-F238E27FC236}">
+                <a16:creationId xmlns:a16="http://schemas.microsoft.com/office/drawing/2014/main" id="{D9EEE24C-B287-6A06-FF08-E06949B335AA}"/>
+              </a:ext>
+            </a:extLst>
+          </p:cNvPr>
+          <p:cNvSpPr>
+            <a:spLocks noGrp="1"/>
+          </p:cNvSpPr>
+          <p:nvPr>
+            <p:ph type="sldNum" sz="quarter" idx="12"/>
+          </p:nvPr>
+        </p:nvSpPr>
+        <p:spPr/>
+        <p:txBody>
+          <a:bodyPr/>
+          <a:lstStyle/>
+          <a:p>
+            <a:fld id="{CC057153-B650-4DEB-B370-79DDCFDCE934}" type="slidenum">
+              <a:rPr lang="en-US" smtClean="0"/>
+              <a:t>1</a:t>
+            </a:fld>
+            <a:endParaRPr lang="en-US"/>
+          </a:p>
+        </p:txBody>
+      </p:sp>
     </p:spTree>
     <p:extLst>
       <p:ext uri="{BB962C8B-B14F-4D97-AF65-F5344CB8AC3E}">
@@ -5149,6 +5377,43 @@
           </a:prstGeom>
         </p:spPr>
       </p:pic>
+      <p:sp>
+        <p:nvSpPr>
+          <p:cNvPr id="5" name="Slide Number Placeholder 4">
+            <a:extLst>
+              <a:ext uri="{FF2B5EF4-FFF2-40B4-BE49-F238E27FC236}">
+                <a16:creationId xmlns:a16="http://schemas.microsoft.com/office/drawing/2014/main" id="{246AC613-0751-9CF4-F3D0-078DD7D0197D}"/>
+              </a:ext>
+            </a:extLst>
+          </p:cNvPr>
+          <p:cNvSpPr>
+            <a:spLocks noGrp="1"/>
+          </p:cNvSpPr>
+          <p:nvPr>
+            <p:ph type="sldNum" sz="quarter" idx="12"/>
+          </p:nvPr>
+        </p:nvSpPr>
+        <p:spPr/>
+        <p:txBody>
+          <a:bodyPr/>
+          <a:lstStyle/>
+          <a:p>
+            <a:fld id="{CC057153-B650-4DEB-B370-79DDCFDCE934}" type="slidenum">
+              <a:rPr lang="en-US" smtClean="0">
+                <a:solidFill>
+                  <a:schemeClr val="bg1"/>
+                </a:solidFill>
+              </a:rPr>
+              <a:t>10</a:t>
+            </a:fld>
+            <a:endParaRPr lang="en-US" dirty="0">
+              <a:solidFill>
+                <a:schemeClr val="bg1"/>
+              </a:solidFill>
+            </a:endParaRPr>
+          </a:p>
+        </p:txBody>
+      </p:sp>
     </p:spTree>
     <p:extLst>
       <p:ext uri="{BB962C8B-B14F-4D97-AF65-F5344CB8AC3E}">
@@ -5322,6 +5587,43 @@
           </a:prstGeom>
         </p:spPr>
       </p:pic>
+      <p:sp>
+        <p:nvSpPr>
+          <p:cNvPr id="5" name="Slide Number Placeholder 4">
+            <a:extLst>
+              <a:ext uri="{FF2B5EF4-FFF2-40B4-BE49-F238E27FC236}">
+                <a16:creationId xmlns:a16="http://schemas.microsoft.com/office/drawing/2014/main" id="{5BDB25E2-FE1A-270A-FF92-C939D4439FC4}"/>
+              </a:ext>
+            </a:extLst>
+          </p:cNvPr>
+          <p:cNvSpPr>
+            <a:spLocks noGrp="1"/>
+          </p:cNvSpPr>
+          <p:nvPr>
+            <p:ph type="sldNum" sz="quarter" idx="12"/>
+          </p:nvPr>
+        </p:nvSpPr>
+        <p:spPr/>
+        <p:txBody>
+          <a:bodyPr/>
+          <a:lstStyle/>
+          <a:p>
+            <a:fld id="{CC057153-B650-4DEB-B370-79DDCFDCE934}" type="slidenum">
+              <a:rPr lang="en-US" smtClean="0">
+                <a:solidFill>
+                  <a:schemeClr val="bg1"/>
+                </a:solidFill>
+              </a:rPr>
+              <a:t>11</a:t>
+            </a:fld>
+            <a:endParaRPr lang="en-US" dirty="0">
+              <a:solidFill>
+                <a:schemeClr val="bg1"/>
+              </a:solidFill>
+            </a:endParaRPr>
+          </a:p>
+        </p:txBody>
+      </p:sp>
     </p:spTree>
     <p:extLst>
       <p:ext uri="{BB962C8B-B14F-4D97-AF65-F5344CB8AC3E}">
@@ -5438,6 +5740,43 @@
           </a:prstGeom>
         </p:spPr>
       </p:pic>
+      <p:sp>
+        <p:nvSpPr>
+          <p:cNvPr id="3" name="Slide Number Placeholder 2">
+            <a:extLst>
+              <a:ext uri="{FF2B5EF4-FFF2-40B4-BE49-F238E27FC236}">
+                <a16:creationId xmlns:a16="http://schemas.microsoft.com/office/drawing/2014/main" id="{212E90B7-F8DE-9E60-C392-08DF92C2A1C3}"/>
+              </a:ext>
+            </a:extLst>
+          </p:cNvPr>
+          <p:cNvSpPr>
+            <a:spLocks noGrp="1"/>
+          </p:cNvSpPr>
+          <p:nvPr>
+            <p:ph type="sldNum" sz="quarter" idx="12"/>
+          </p:nvPr>
+        </p:nvSpPr>
+        <p:spPr/>
+        <p:txBody>
+          <a:bodyPr/>
+          <a:lstStyle/>
+          <a:p>
+            <a:fld id="{CC057153-B650-4DEB-B370-79DDCFDCE934}" type="slidenum">
+              <a:rPr lang="en-US" smtClean="0">
+                <a:solidFill>
+                  <a:schemeClr val="bg1"/>
+                </a:solidFill>
+              </a:rPr>
+              <a:t>12</a:t>
+            </a:fld>
+            <a:endParaRPr lang="en-US" dirty="0">
+              <a:solidFill>
+                <a:schemeClr val="bg1"/>
+              </a:solidFill>
+            </a:endParaRPr>
+          </a:p>
+        </p:txBody>
+      </p:sp>
     </p:spTree>
     <p:extLst>
       <p:ext uri="{BB962C8B-B14F-4D97-AF65-F5344CB8AC3E}">
@@ -5622,6 +5961,43 @@
           </a:prstGeom>
         </p:spPr>
       </p:pic>
+      <p:sp>
+        <p:nvSpPr>
+          <p:cNvPr id="5" name="Slide Number Placeholder 4">
+            <a:extLst>
+              <a:ext uri="{FF2B5EF4-FFF2-40B4-BE49-F238E27FC236}">
+                <a16:creationId xmlns:a16="http://schemas.microsoft.com/office/drawing/2014/main" id="{CD3D85EC-630B-9C37-27AD-6FC4AE8F885E}"/>
+              </a:ext>
+            </a:extLst>
+          </p:cNvPr>
+          <p:cNvSpPr>
+            <a:spLocks noGrp="1"/>
+          </p:cNvSpPr>
+          <p:nvPr>
+            <p:ph type="sldNum" sz="quarter" idx="12"/>
+          </p:nvPr>
+        </p:nvSpPr>
+        <p:spPr/>
+        <p:txBody>
+          <a:bodyPr/>
+          <a:lstStyle/>
+          <a:p>
+            <a:r>
+              <a:rPr lang="en-US" dirty="0">
+                <a:solidFill>
+                  <a:schemeClr val="bg1"/>
+                </a:solidFill>
+              </a:rPr>
+              <a:t>2</a:t>
+            </a:r>
+            <a:fld id="{CC057153-B650-4DEB-B370-79DDCFDCE934}" type="slidenum">
+              <a:rPr lang="en-US" smtClean="0"/>
+              <a:t>2</a:t>
+            </a:fld>
+            <a:endParaRPr lang="en-US" dirty="0"/>
+          </a:p>
+        </p:txBody>
+      </p:sp>
     </p:spTree>
     <p:extLst>
       <p:ext uri="{BB962C8B-B14F-4D97-AF65-F5344CB8AC3E}">
@@ -5666,102 +6042,6 @@
           <a:chExt cx="0" cy="0"/>
         </a:xfrm>
       </p:grpSpPr>
-      <p:sp>
-        <p:nvSpPr>
-          <p:cNvPr id="2" name="Title 1">
-            <a:extLst>
-              <a:ext uri="{FF2B5EF4-FFF2-40B4-BE49-F238E27FC236}">
-                <a16:creationId xmlns:a16="http://schemas.microsoft.com/office/drawing/2014/main" id="{A97BF6B1-28FF-125D-F160-754578EFE913}"/>
-              </a:ext>
-            </a:extLst>
-          </p:cNvPr>
-          <p:cNvSpPr>
-            <a:spLocks noGrp="1"/>
-          </p:cNvSpPr>
-          <p:nvPr>
-            <p:ph type="title"/>
-          </p:nvPr>
-        </p:nvSpPr>
-        <p:spPr/>
-        <p:txBody>
-          <a:bodyPr/>
-          <a:lstStyle/>
-          <a:p>
-            <a:r>
-              <a:rPr lang="en-US" dirty="0">
-                <a:solidFill>
-                  <a:schemeClr val="bg1"/>
-                </a:solidFill>
-              </a:rPr>
-              <a:t>My “Why”</a:t>
-            </a:r>
-          </a:p>
-        </p:txBody>
-      </p:sp>
-      <p:sp>
-        <p:nvSpPr>
-          <p:cNvPr id="3" name="Content Placeholder 2">
-            <a:extLst>
-              <a:ext uri="{FF2B5EF4-FFF2-40B4-BE49-F238E27FC236}">
-                <a16:creationId xmlns:a16="http://schemas.microsoft.com/office/drawing/2014/main" id="{C00D1ED4-7306-39B9-8221-8976B96CF1D0}"/>
-              </a:ext>
-            </a:extLst>
-          </p:cNvPr>
-          <p:cNvSpPr>
-            <a:spLocks noGrp="1"/>
-          </p:cNvSpPr>
-          <p:nvPr>
-            <p:ph idx="1"/>
-          </p:nvPr>
-        </p:nvSpPr>
-        <p:spPr/>
-        <p:txBody>
-          <a:bodyPr>
-            <a:normAutofit/>
-          </a:bodyPr>
-          <a:lstStyle/>
-          <a:p>
-            <a:r>
-              <a:rPr lang="en-US" sz="2800" dirty="0">
-                <a:solidFill>
-                  <a:schemeClr val="bg1"/>
-                </a:solidFill>
-              </a:rPr>
-              <a:t>Interest in cybersecurity</a:t>
-            </a:r>
-          </a:p>
-          <a:p>
-            <a:r>
-              <a:rPr lang="en-US" sz="2800" dirty="0">
-                <a:solidFill>
-                  <a:schemeClr val="bg1"/>
-                </a:solidFill>
-              </a:rPr>
-              <a:t>Passion for protecting users</a:t>
-            </a:r>
-          </a:p>
-          <a:p>
-            <a:r>
-              <a:rPr lang="en-US" sz="2800" dirty="0">
-                <a:solidFill>
-                  <a:schemeClr val="bg1"/>
-                </a:solidFill>
-              </a:rPr>
-              <a:t>Real-world relevance</a:t>
-            </a:r>
-          </a:p>
-          <a:p>
-            <a:r>
-              <a:rPr lang="en-US" sz="2800" dirty="0">
-                <a:solidFill>
-                  <a:schemeClr val="bg1"/>
-                </a:solidFill>
-              </a:rPr>
-              <a:t>Combines security &amp; usability</a:t>
-            </a:r>
-          </a:p>
-        </p:txBody>
-      </p:sp>
       <p:pic>
         <p:nvPicPr>
           <p:cNvPr id="4" name="Picture 3">
@@ -5787,7 +6067,7 @@
         </p:blipFill>
         <p:spPr>
           <a:xfrm rot="10800000">
-            <a:off x="0" y="4684704"/>
+            <a:off x="0" y="4644831"/>
             <a:ext cx="12192000" cy="2173296"/>
           </a:xfrm>
           <a:prstGeom prst="rect">
@@ -5795,6 +6075,143 @@
           </a:prstGeom>
         </p:spPr>
       </p:pic>
+      <p:sp>
+        <p:nvSpPr>
+          <p:cNvPr id="2" name="Title 1">
+            <a:extLst>
+              <a:ext uri="{FF2B5EF4-FFF2-40B4-BE49-F238E27FC236}">
+                <a16:creationId xmlns:a16="http://schemas.microsoft.com/office/drawing/2014/main" id="{A97BF6B1-28FF-125D-F160-754578EFE913}"/>
+              </a:ext>
+            </a:extLst>
+          </p:cNvPr>
+          <p:cNvSpPr>
+            <a:spLocks noGrp="1"/>
+          </p:cNvSpPr>
+          <p:nvPr>
+            <p:ph type="title"/>
+          </p:nvPr>
+        </p:nvSpPr>
+        <p:spPr/>
+        <p:txBody>
+          <a:bodyPr/>
+          <a:lstStyle/>
+          <a:p>
+            <a:r>
+              <a:rPr lang="en-US" dirty="0">
+                <a:solidFill>
+                  <a:schemeClr val="bg1"/>
+                </a:solidFill>
+              </a:rPr>
+              <a:t>My “Why”</a:t>
+            </a:r>
+          </a:p>
+        </p:txBody>
+      </p:sp>
+      <p:sp>
+        <p:nvSpPr>
+          <p:cNvPr id="3" name="Content Placeholder 2">
+            <a:extLst>
+              <a:ext uri="{FF2B5EF4-FFF2-40B4-BE49-F238E27FC236}">
+                <a16:creationId xmlns:a16="http://schemas.microsoft.com/office/drawing/2014/main" id="{C00D1ED4-7306-39B9-8221-8976B96CF1D0}"/>
+              </a:ext>
+            </a:extLst>
+          </p:cNvPr>
+          <p:cNvSpPr>
+            <a:spLocks noGrp="1"/>
+          </p:cNvSpPr>
+          <p:nvPr>
+            <p:ph idx="1"/>
+          </p:nvPr>
+        </p:nvSpPr>
+        <p:spPr/>
+        <p:txBody>
+          <a:bodyPr>
+            <a:normAutofit/>
+          </a:bodyPr>
+          <a:lstStyle/>
+          <a:p>
+            <a:r>
+              <a:rPr lang="en-US" sz="2800" dirty="0">
+                <a:solidFill>
+                  <a:schemeClr val="bg1"/>
+                </a:solidFill>
+              </a:rPr>
+              <a:t>Interest in cybersecurity</a:t>
+            </a:r>
+          </a:p>
+          <a:p>
+            <a:r>
+              <a:rPr lang="en-US" sz="2800" dirty="0">
+                <a:solidFill>
+                  <a:schemeClr val="bg1"/>
+                </a:solidFill>
+              </a:rPr>
+              <a:t>Passion for protecting users</a:t>
+            </a:r>
+          </a:p>
+          <a:p>
+            <a:r>
+              <a:rPr lang="en-US" sz="2800" dirty="0">
+                <a:solidFill>
+                  <a:schemeClr val="bg1"/>
+                </a:solidFill>
+              </a:rPr>
+              <a:t>Real-world relevance</a:t>
+            </a:r>
+          </a:p>
+          <a:p>
+            <a:r>
+              <a:rPr lang="en-US" sz="2800" dirty="0">
+                <a:solidFill>
+                  <a:schemeClr val="bg1"/>
+                </a:solidFill>
+              </a:rPr>
+              <a:t>Combines security &amp; usability</a:t>
+            </a:r>
+          </a:p>
+        </p:txBody>
+      </p:sp>
+      <p:sp>
+        <p:nvSpPr>
+          <p:cNvPr id="5" name="Slide Number Placeholder 4">
+            <a:extLst>
+              <a:ext uri="{FF2B5EF4-FFF2-40B4-BE49-F238E27FC236}">
+                <a16:creationId xmlns:a16="http://schemas.microsoft.com/office/drawing/2014/main" id="{B0AD846C-70CF-5FCF-A060-CDBA1182751A}"/>
+              </a:ext>
+            </a:extLst>
+          </p:cNvPr>
+          <p:cNvSpPr>
+            <a:spLocks noGrp="1"/>
+          </p:cNvSpPr>
+          <p:nvPr>
+            <p:ph type="sldNum" sz="quarter" idx="12"/>
+          </p:nvPr>
+        </p:nvSpPr>
+        <p:spPr/>
+        <p:txBody>
+          <a:bodyPr/>
+          <a:lstStyle/>
+          <a:p>
+            <a:r>
+              <a:rPr lang="en-US" dirty="0">
+                <a:solidFill>
+                  <a:schemeClr val="bg1"/>
+                </a:solidFill>
+              </a:rPr>
+              <a:t>3</a:t>
+            </a:r>
+            <a:fld id="{CC057153-B650-4DEB-B370-79DDCFDCE934}" type="slidenum">
+              <a:rPr lang="en-US" smtClean="0"/>
+              <a:pPr/>
+              <a:t>2</a:t>
+            </a:fld>
+            <a:endParaRPr lang="en-US" dirty="0"/>
+          </a:p>
+          <a:p>
+            <a:endParaRPr lang="en-US" dirty="0"/>
+          </a:p>
+        </p:txBody>
+      </p:sp>
     </p:spTree>
     <p:extLst>
       <p:ext uri="{BB962C8B-B14F-4D97-AF65-F5344CB8AC3E}">
@@ -5958,6 +6375,43 @@
           </a:prstGeom>
         </p:spPr>
       </p:pic>
+      <p:sp>
+        <p:nvSpPr>
+          <p:cNvPr id="5" name="Slide Number Placeholder 4">
+            <a:extLst>
+              <a:ext uri="{FF2B5EF4-FFF2-40B4-BE49-F238E27FC236}">
+                <a16:creationId xmlns:a16="http://schemas.microsoft.com/office/drawing/2014/main" id="{09B41E0A-D384-11D4-20B5-B223041B71BD}"/>
+              </a:ext>
+            </a:extLst>
+          </p:cNvPr>
+          <p:cNvSpPr>
+            <a:spLocks noGrp="1"/>
+          </p:cNvSpPr>
+          <p:nvPr>
+            <p:ph type="sldNum" sz="quarter" idx="12"/>
+          </p:nvPr>
+        </p:nvSpPr>
+        <p:spPr/>
+        <p:txBody>
+          <a:bodyPr/>
+          <a:lstStyle/>
+          <a:p>
+            <a:fld id="{CC057153-B650-4DEB-B370-79DDCFDCE934}" type="slidenum">
+              <a:rPr lang="en-US" smtClean="0">
+                <a:solidFill>
+                  <a:schemeClr val="bg1"/>
+                </a:solidFill>
+              </a:rPr>
+              <a:t>4</a:t>
+            </a:fld>
+            <a:endParaRPr lang="en-US" dirty="0">
+              <a:solidFill>
+                <a:schemeClr val="bg1"/>
+              </a:solidFill>
+            </a:endParaRPr>
+          </a:p>
+        </p:txBody>
+      </p:sp>
     </p:spTree>
     <p:extLst>
       <p:ext uri="{BB962C8B-B14F-4D97-AF65-F5344CB8AC3E}">
@@ -6074,6 +6528,43 @@
           </a:prstGeom>
         </p:spPr>
       </p:pic>
+      <p:sp>
+        <p:nvSpPr>
+          <p:cNvPr id="3" name="Slide Number Placeholder 2">
+            <a:extLst>
+              <a:ext uri="{FF2B5EF4-FFF2-40B4-BE49-F238E27FC236}">
+                <a16:creationId xmlns:a16="http://schemas.microsoft.com/office/drawing/2014/main" id="{9FC9931D-313D-833A-99E0-C528115B1FDE}"/>
+              </a:ext>
+            </a:extLst>
+          </p:cNvPr>
+          <p:cNvSpPr>
+            <a:spLocks noGrp="1"/>
+          </p:cNvSpPr>
+          <p:nvPr>
+            <p:ph type="sldNum" sz="quarter" idx="12"/>
+          </p:nvPr>
+        </p:nvSpPr>
+        <p:spPr/>
+        <p:txBody>
+          <a:bodyPr/>
+          <a:lstStyle/>
+          <a:p>
+            <a:fld id="{CC057153-B650-4DEB-B370-79DDCFDCE934}" type="slidenum">
+              <a:rPr lang="en-US" smtClean="0">
+                <a:solidFill>
+                  <a:schemeClr val="bg1"/>
+                </a:solidFill>
+              </a:rPr>
+              <a:t>5</a:t>
+            </a:fld>
+            <a:endParaRPr lang="en-US" dirty="0">
+              <a:solidFill>
+                <a:schemeClr val="bg1"/>
+              </a:solidFill>
+            </a:endParaRPr>
+          </a:p>
+        </p:txBody>
+      </p:sp>
     </p:spTree>
     <p:extLst>
       <p:ext uri="{BB962C8B-B14F-4D97-AF65-F5344CB8AC3E}">
@@ -6280,6 +6771,43 @@
           </a:p>
         </p:txBody>
       </p:sp>
+      <p:sp>
+        <p:nvSpPr>
+          <p:cNvPr id="5" name="Slide Number Placeholder 4">
+            <a:extLst>
+              <a:ext uri="{FF2B5EF4-FFF2-40B4-BE49-F238E27FC236}">
+                <a16:creationId xmlns:a16="http://schemas.microsoft.com/office/drawing/2014/main" id="{7E1194D8-2EEB-214F-8544-F620F2712994}"/>
+              </a:ext>
+            </a:extLst>
+          </p:cNvPr>
+          <p:cNvSpPr>
+            <a:spLocks noGrp="1"/>
+          </p:cNvSpPr>
+          <p:nvPr>
+            <p:ph type="sldNum" sz="quarter" idx="12"/>
+          </p:nvPr>
+        </p:nvSpPr>
+        <p:spPr/>
+        <p:txBody>
+          <a:bodyPr/>
+          <a:lstStyle/>
+          <a:p>
+            <a:fld id="{CC057153-B650-4DEB-B370-79DDCFDCE934}" type="slidenum">
+              <a:rPr lang="en-US" smtClean="0">
+                <a:solidFill>
+                  <a:schemeClr val="bg1"/>
+                </a:solidFill>
+              </a:rPr>
+              <a:t>6</a:t>
+            </a:fld>
+            <a:endParaRPr lang="en-US" dirty="0">
+              <a:solidFill>
+                <a:schemeClr val="bg1"/>
+              </a:solidFill>
+            </a:endParaRPr>
+          </a:p>
+        </p:txBody>
+      </p:sp>
     </p:spTree>
     <p:extLst>
       <p:ext uri="{BB962C8B-B14F-4D97-AF65-F5344CB8AC3E}">
@@ -6463,6 +6991,43 @@
           </a:p>
         </p:txBody>
       </p:sp>
+      <p:sp>
+        <p:nvSpPr>
+          <p:cNvPr id="5" name="Slide Number Placeholder 4">
+            <a:extLst>
+              <a:ext uri="{FF2B5EF4-FFF2-40B4-BE49-F238E27FC236}">
+                <a16:creationId xmlns:a16="http://schemas.microsoft.com/office/drawing/2014/main" id="{5B70EC69-DDCA-467A-9E3C-68C8E3152AFC}"/>
+              </a:ext>
+            </a:extLst>
+          </p:cNvPr>
+          <p:cNvSpPr>
+            <a:spLocks noGrp="1"/>
+          </p:cNvSpPr>
+          <p:nvPr>
+            <p:ph type="sldNum" sz="quarter" idx="12"/>
+          </p:nvPr>
+        </p:nvSpPr>
+        <p:spPr/>
+        <p:txBody>
+          <a:bodyPr/>
+          <a:lstStyle/>
+          <a:p>
+            <a:fld id="{CC057153-B650-4DEB-B370-79DDCFDCE934}" type="slidenum">
+              <a:rPr lang="en-US" smtClean="0">
+                <a:solidFill>
+                  <a:schemeClr val="bg1"/>
+                </a:solidFill>
+              </a:rPr>
+              <a:t>7</a:t>
+            </a:fld>
+            <a:endParaRPr lang="en-US" dirty="0">
+              <a:solidFill>
+                <a:schemeClr val="bg1"/>
+              </a:solidFill>
+            </a:endParaRPr>
+          </a:p>
+        </p:txBody>
+      </p:sp>
     </p:spTree>
     <p:extLst>
       <p:ext uri="{BB962C8B-B14F-4D97-AF65-F5344CB8AC3E}">
@@ -6642,6 +7207,43 @@
           </a:prstGeom>
         </p:spPr>
       </p:pic>
+      <p:sp>
+        <p:nvSpPr>
+          <p:cNvPr id="5" name="Slide Number Placeholder 4">
+            <a:extLst>
+              <a:ext uri="{FF2B5EF4-FFF2-40B4-BE49-F238E27FC236}">
+                <a16:creationId xmlns:a16="http://schemas.microsoft.com/office/drawing/2014/main" id="{7A19E8BB-201D-FA51-FAD9-83FAD9E59AE1}"/>
+              </a:ext>
+            </a:extLst>
+          </p:cNvPr>
+          <p:cNvSpPr>
+            <a:spLocks noGrp="1"/>
+          </p:cNvSpPr>
+          <p:nvPr>
+            <p:ph type="sldNum" sz="quarter" idx="12"/>
+          </p:nvPr>
+        </p:nvSpPr>
+        <p:spPr/>
+        <p:txBody>
+          <a:bodyPr/>
+          <a:lstStyle/>
+          <a:p>
+            <a:fld id="{CC057153-B650-4DEB-B370-79DDCFDCE934}" type="slidenum">
+              <a:rPr lang="en-US" smtClean="0">
+                <a:solidFill>
+                  <a:schemeClr val="bg1"/>
+                </a:solidFill>
+              </a:rPr>
+              <a:t>8</a:t>
+            </a:fld>
+            <a:endParaRPr lang="en-US" dirty="0">
+              <a:solidFill>
+                <a:schemeClr val="bg1"/>
+              </a:solidFill>
+            </a:endParaRPr>
+          </a:p>
+        </p:txBody>
+      </p:sp>
     </p:spTree>
     <p:extLst>
       <p:ext uri="{BB962C8B-B14F-4D97-AF65-F5344CB8AC3E}">
@@ -6815,6 +7417,43 @@
           </a:prstGeom>
         </p:spPr>
       </p:pic>
+      <p:sp>
+        <p:nvSpPr>
+          <p:cNvPr id="5" name="Slide Number Placeholder 4">
+            <a:extLst>
+              <a:ext uri="{FF2B5EF4-FFF2-40B4-BE49-F238E27FC236}">
+                <a16:creationId xmlns:a16="http://schemas.microsoft.com/office/drawing/2014/main" id="{84709F68-7FBE-740C-896A-E529CB7798C1}"/>
+              </a:ext>
+            </a:extLst>
+          </p:cNvPr>
+          <p:cNvSpPr>
+            <a:spLocks noGrp="1"/>
+          </p:cNvSpPr>
+          <p:nvPr>
+            <p:ph type="sldNum" sz="quarter" idx="12"/>
+          </p:nvPr>
+        </p:nvSpPr>
+        <p:spPr/>
+        <p:txBody>
+          <a:bodyPr/>
+          <a:lstStyle/>
+          <a:p>
+            <a:fld id="{CC057153-B650-4DEB-B370-79DDCFDCE934}" type="slidenum">
+              <a:rPr lang="en-US" smtClean="0">
+                <a:solidFill>
+                  <a:schemeClr val="bg1"/>
+                </a:solidFill>
+              </a:rPr>
+              <a:t>9</a:t>
+            </a:fld>
+            <a:endParaRPr lang="en-US" dirty="0">
+              <a:solidFill>
+                <a:schemeClr val="bg1"/>
+              </a:solidFill>
+            </a:endParaRPr>
+          </a:p>
+        </p:txBody>
+      </p:sp>
     </p:spTree>
     <p:extLst>
       <p:ext uri="{BB962C8B-B14F-4D97-AF65-F5344CB8AC3E}">
@@ -7342,4 +7981,319 @@
     </a:ext>
   </a:extLst>
 </a:theme>
+</file>
+
+<file path=ppt/theme/theme3.xml><?xml version="1.0" encoding="utf-8"?>
+<a:theme xmlns:a="http://schemas.openxmlformats.org/drawingml/2006/main" name="Office Theme">
+  <a:themeElements>
+    <a:clrScheme name="Office">
+      <a:dk1>
+        <a:sysClr val="windowText" lastClr="000000"/>
+      </a:dk1>
+      <a:lt1>
+        <a:sysClr val="window" lastClr="FFFFFF"/>
+      </a:lt1>
+      <a:dk2>
+        <a:srgbClr val="0E2841"/>
+      </a:dk2>
+      <a:lt2>
+        <a:srgbClr val="E8E8E8"/>
+      </a:lt2>
+      <a:accent1>
+        <a:srgbClr val="156082"/>
+      </a:accent1>
+      <a:accent2>
+        <a:srgbClr val="E97132"/>
+      </a:accent2>
+      <a:accent3>
+        <a:srgbClr val="196B24"/>
+      </a:accent3>
+      <a:accent4>
+        <a:srgbClr val="0F9ED5"/>
+      </a:accent4>
+      <a:accent5>
+        <a:srgbClr val="A02B93"/>
+      </a:accent5>
+      <a:accent6>
+        <a:srgbClr val="4EA72E"/>
+      </a:accent6>
+      <a:hlink>
+        <a:srgbClr val="467886"/>
+      </a:hlink>
+      <a:folHlink>
+        <a:srgbClr val="96607D"/>
+      </a:folHlink>
+    </a:clrScheme>
+    <a:fontScheme name="Office">
+      <a:majorFont>
+        <a:latin typeface="Aptos Display" panose="02110004020202020204"/>
+        <a:ea typeface=""/>
+        <a:cs typeface=""/>
+        <a:font script="Jpan" typeface="游ゴシック Light"/>
+        <a:font script="Hang" typeface="맑은 고딕"/>
+        <a:font script="Hans" typeface="等线 Light"/>
+        <a:font script="Hant" typeface="新細明體"/>
+        <a:font script="Arab" typeface="Times New Roman"/>
+        <a:font script="Hebr" typeface="Times New Roman"/>
+        <a:font script="Thai" typeface="Angsana New"/>
+        <a:font script="Ethi" typeface="Nyala"/>
+        <a:font script="Beng" typeface="Vrinda"/>
+        <a:font script="Gujr" typeface="Shruti"/>
+        <a:font script="Khmr" typeface="MoolBoran"/>
+        <a:font script="Knda" typeface="Tunga"/>
+        <a:font script="Guru" typeface="Raavi"/>
+        <a:font script="Cans" typeface="Euphemia"/>
+        <a:font script="Cher" typeface="Plantagenet Cherokee"/>
+        <a:font script="Yiii" typeface="Microsoft Yi Baiti"/>
+        <a:font script="Tibt" typeface="Microsoft Himalaya"/>
+        <a:font script="Thaa" typeface="MV Boli"/>
+        <a:font script="Deva" typeface="Mangal"/>
+        <a:font script="Telu" typeface="Gautami"/>
+        <a:font script="Taml" typeface="Latha"/>
+        <a:font script="Syrc" typeface="Estrangelo Edessa"/>
+        <a:font script="Orya" typeface="Kalinga"/>
+        <a:font script="Mlym" typeface="Kartika"/>
+        <a:font script="Laoo" typeface="DokChampa"/>
+        <a:font script="Sinh" typeface="Iskoola Pota"/>
+        <a:font script="Mong" typeface="Mongolian Baiti"/>
+        <a:font script="Viet" typeface="Times New Roman"/>
+        <a:font script="Uigh" typeface="Microsoft Uighur"/>
+        <a:font script="Geor" typeface="Sylfaen"/>
+        <a:font script="Armn" typeface="Arial"/>
+        <a:font script="Bugi" typeface="Leelawadee UI"/>
+        <a:font script="Bopo" typeface="Microsoft JhengHei"/>
+        <a:font script="Java" typeface="Javanese Text"/>
+        <a:font script="Lisu" typeface="Segoe UI"/>
+        <a:font script="Mymr" typeface="Myanmar Text"/>
+        <a:font script="Nkoo" typeface="Ebrima"/>
+        <a:font script="Olck" typeface="Nirmala UI"/>
+        <a:font script="Osma" typeface="Ebrima"/>
+        <a:font script="Phag" typeface="Phagspa"/>
+        <a:font script="Syrn" typeface="Estrangelo Edessa"/>
+        <a:font script="Syrj" typeface="Estrangelo Edessa"/>
+        <a:font script="Syre" typeface="Estrangelo Edessa"/>
+        <a:font script="Sora" typeface="Nirmala UI"/>
+        <a:font script="Tale" typeface="Microsoft Tai Le"/>
+        <a:font script="Talu" typeface="Microsoft New Tai Lue"/>
+        <a:font script="Tfng" typeface="Ebrima"/>
+      </a:majorFont>
+      <a:minorFont>
+        <a:latin typeface="Aptos" panose="02110004020202020204"/>
+        <a:ea typeface=""/>
+        <a:cs typeface=""/>
+        <a:font script="Jpan" typeface="游ゴシック"/>
+        <a:font script="Hang" typeface="맑은 고딕"/>
+        <a:font script="Hans" typeface="等线"/>
+        <a:font script="Hant" typeface="新細明體"/>
+        <a:font script="Arab" typeface="Arial"/>
+        <a:font script="Hebr" typeface="Arial"/>
+        <a:font script="Thai" typeface="Cordia New"/>
+        <a:font script="Ethi" typeface="Nyala"/>
+        <a:font script="Beng" typeface="Vrinda"/>
+        <a:font script="Gujr" typeface="Shruti"/>
+        <a:font script="Khmr" typeface="DaunPenh"/>
+        <a:font script="Knda" typeface="Tunga"/>
+        <a:font script="Guru" typeface="Raavi"/>
+        <a:font script="Cans" typeface="Euphemia"/>
+        <a:font script="Cher" typeface="Plantagenet Cherokee"/>
+        <a:font script="Yiii" typeface="Microsoft Yi Baiti"/>
+        <a:font script="Tibt" typeface="Microsoft Himalaya"/>
+        <a:font script="Thaa" typeface="MV Boli"/>
+        <a:font script="Deva" typeface="Mangal"/>
+        <a:font script="Telu" typeface="Gautami"/>
+        <a:font script="Taml" typeface="Latha"/>
+        <a:font script="Syrc" typeface="Estrangelo Edessa"/>
+        <a:font script="Orya" typeface="Kalinga"/>
+        <a:font script="Mlym" typeface="Kartika"/>
+        <a:font script="Laoo" typeface="DokChampa"/>
+        <a:font script="Sinh" typeface="Iskoola Pota"/>
+        <a:font script="Mong" typeface="Mongolian Baiti"/>
+        <a:font script="Viet" typeface="Arial"/>
+        <a:font script="Uigh" typeface="Microsoft Uighur"/>
+        <a:font script="Geor" typeface="Sylfaen"/>
+        <a:font script="Armn" typeface="Arial"/>
+        <a:font script="Bugi" typeface="Leelawadee UI"/>
+        <a:font script="Bopo" typeface="Microsoft JhengHei"/>
+        <a:font script="Java" typeface="Javanese Text"/>
+        <a:font script="Lisu" typeface="Segoe UI"/>
+        <a:font script="Mymr" typeface="Myanmar Text"/>
+        <a:font script="Nkoo" typeface="Ebrima"/>
+        <a:font script="Olck" typeface="Nirmala UI"/>
+        <a:font script="Osma" typeface="Ebrima"/>
+        <a:font script="Phag" typeface="Phagspa"/>
+        <a:font script="Syrn" typeface="Estrangelo Edessa"/>
+        <a:font script="Syrj" typeface="Estrangelo Edessa"/>
+        <a:font script="Syre" typeface="Estrangelo Edessa"/>
+        <a:font script="Sora" typeface="Nirmala UI"/>
+        <a:font script="Tale" typeface="Microsoft Tai Le"/>
+        <a:font script="Talu" typeface="Microsoft New Tai Lue"/>
+        <a:font script="Tfng" typeface="Ebrima"/>
+      </a:minorFont>
+    </a:fontScheme>
+    <a:fmtScheme name="Office">
+      <a:fillStyleLst>
+        <a:solidFill>
+          <a:schemeClr val="phClr"/>
+        </a:solidFill>
+        <a:gradFill rotWithShape="1">
+          <a:gsLst>
+            <a:gs pos="0">
+              <a:schemeClr val="phClr">
+                <a:lumMod val="110000"/>
+                <a:satMod val="105000"/>
+                <a:tint val="67000"/>
+              </a:schemeClr>
+            </a:gs>
+            <a:gs pos="50000">
+              <a:schemeClr val="phClr">
+                <a:lumMod val="105000"/>
+                <a:satMod val="103000"/>
+                <a:tint val="73000"/>
+              </a:schemeClr>
+            </a:gs>
+            <a:gs pos="100000">
+              <a:schemeClr val="phClr">
+                <a:lumMod val="105000"/>
+                <a:satMod val="109000"/>
+                <a:tint val="81000"/>
+              </a:schemeClr>
+            </a:gs>
+          </a:gsLst>
+          <a:lin ang="5400000" scaled="0"/>
+        </a:gradFill>
+        <a:gradFill rotWithShape="1">
+          <a:gsLst>
+            <a:gs pos="0">
+              <a:schemeClr val="phClr">
+                <a:satMod val="103000"/>
+                <a:lumMod val="102000"/>
+                <a:tint val="94000"/>
+              </a:schemeClr>
+            </a:gs>
+            <a:gs pos="50000">
+              <a:schemeClr val="phClr">
+                <a:satMod val="110000"/>
+                <a:lumMod val="100000"/>
+                <a:shade val="100000"/>
+              </a:schemeClr>
+            </a:gs>
+            <a:gs pos="100000">
+              <a:schemeClr val="phClr">
+                <a:lumMod val="99000"/>
+                <a:satMod val="120000"/>
+                <a:shade val="78000"/>
+              </a:schemeClr>
+            </a:gs>
+          </a:gsLst>
+          <a:lin ang="5400000" scaled="0"/>
+        </a:gradFill>
+      </a:fillStyleLst>
+      <a:lnStyleLst>
+        <a:ln w="12700" cap="flat" cmpd="sng" algn="ctr">
+          <a:solidFill>
+            <a:schemeClr val="phClr"/>
+          </a:solidFill>
+          <a:prstDash val="solid"/>
+          <a:miter lim="800000"/>
+        </a:ln>
+        <a:ln w="19050" cap="flat" cmpd="sng" algn="ctr">
+          <a:solidFill>
+            <a:schemeClr val="phClr"/>
+          </a:solidFill>
+          <a:prstDash val="solid"/>
+          <a:miter lim="800000"/>
+        </a:ln>
+        <a:ln w="25400" cap="flat" cmpd="sng" algn="ctr">
+          <a:solidFill>
+            <a:schemeClr val="phClr"/>
+          </a:solidFill>
+          <a:prstDash val="solid"/>
+          <a:miter lim="800000"/>
+        </a:ln>
+      </a:lnStyleLst>
+      <a:effectStyleLst>
+        <a:effectStyle>
+          <a:effectLst/>
+        </a:effectStyle>
+        <a:effectStyle>
+          <a:effectLst/>
+        </a:effectStyle>
+        <a:effectStyle>
+          <a:effectLst>
+            <a:outerShdw blurRad="57150" dist="19050" dir="5400000" algn="ctr" rotWithShape="0">
+              <a:srgbClr val="000000">
+                <a:alpha val="63000"/>
+              </a:srgbClr>
+            </a:outerShdw>
+          </a:effectLst>
+        </a:effectStyle>
+      </a:effectStyleLst>
+      <a:bgFillStyleLst>
+        <a:solidFill>
+          <a:schemeClr val="phClr"/>
+        </a:solidFill>
+        <a:solidFill>
+          <a:schemeClr val="phClr">
+            <a:tint val="95000"/>
+            <a:satMod val="170000"/>
+          </a:schemeClr>
+        </a:solidFill>
+        <a:gradFill rotWithShape="1">
+          <a:gsLst>
+            <a:gs pos="0">
+              <a:schemeClr val="phClr">
+                <a:tint val="93000"/>
+                <a:satMod val="150000"/>
+                <a:shade val="98000"/>
+                <a:lumMod val="102000"/>
+              </a:schemeClr>
+            </a:gs>
+            <a:gs pos="50000">
+              <a:schemeClr val="phClr">
+                <a:tint val="98000"/>
+                <a:satMod val="130000"/>
+                <a:shade val="90000"/>
+                <a:lumMod val="103000"/>
+              </a:schemeClr>
+            </a:gs>
+            <a:gs pos="100000">
+              <a:schemeClr val="phClr">
+                <a:shade val="63000"/>
+                <a:satMod val="120000"/>
+              </a:schemeClr>
+            </a:gs>
+          </a:gsLst>
+          <a:lin ang="5400000" scaled="0"/>
+        </a:gradFill>
+      </a:bgFillStyleLst>
+    </a:fmtScheme>
+  </a:themeElements>
+  <a:objectDefaults>
+    <a:lnDef>
+      <a:spPr/>
+      <a:bodyPr/>
+      <a:lstStyle/>
+      <a:style>
+        <a:lnRef idx="2">
+          <a:schemeClr val="accent1"/>
+        </a:lnRef>
+        <a:fillRef idx="0">
+          <a:schemeClr val="accent1"/>
+        </a:fillRef>
+        <a:effectRef idx="1">
+          <a:schemeClr val="accent1"/>
+        </a:effectRef>
+        <a:fontRef idx="minor">
+          <a:schemeClr val="tx1"/>
+        </a:fontRef>
+      </a:style>
+    </a:lnDef>
+  </a:objectDefaults>
+  <a:extraClrSchemeLst/>
+  <a:extLst>
+    <a:ext uri="{05A4C25C-085E-4340-85A3-A5531E510DB2}">
+      <thm15:themeFamily xmlns:thm15="http://schemas.microsoft.com/office/thememl/2012/main" name="Office Theme" id="{2E142A2C-CD16-42D6-873A-C26D2A0506FA}" vid="{1BDDFF52-6CD6-40A5-AB3C-68EB2F1E4D0A}"/>
+    </a:ext>
+  </a:extLst>
+</a:theme>
 </file>
--- a/SecurePassPresentation.pptx
+++ b/SecurePassPresentation.pptx
@@ -223,7 +223,7 @@
           <a:p>
             <a:fld id="{F044046C-EF10-4B59-B4E7-8DC889B4A833}" type="datetimeFigureOut">
               <a:rPr lang="en-US" smtClean="0"/>
-              <a:t>4/14/2026</a:t>
+              <a:t>4/15/2026</a:t>
             </a:fld>
             <a:endParaRPr lang="en-US"/>
           </a:p>
@@ -401,7 +401,7 @@
           <a:p>
             <a:fld id="{D60145E7-B66D-4946-A0AF-80F6A88D916A}" type="datetimeFigureOut">
               <a:rPr lang="en-US" smtClean="0"/>
-              <a:t>4/14/2026</a:t>
+              <a:t>4/15/2026</a:t>
             </a:fld>
             <a:endParaRPr lang="en-US"/>
           </a:p>
@@ -1099,7 +1099,7 @@
           <a:p>
             <a:r>
               <a:rPr lang="en-US" dirty="0"/>
-              <a:t>I also completed more extensive testing and documentation than would normally be required.”</a:t>
+              <a:t>This involved many challenges.”</a:t>
             </a:r>
           </a:p>
         </p:txBody>
@@ -1503,7 +1503,7 @@
           <a:p>
             <a:r>
               <a:rPr lang="en-US" dirty="0"/>
-              <a:t>“All unit tests passed successfully, and user testing showed that all participants understood the feedback provided.</a:t>
+              <a:t>“I decided to use unit tests and acceptance testing for this project, which included 6 users. All unit tests passed successfully, and user testing showed that all participants understood the feedback provided.</a:t>
             </a:r>
           </a:p>
           <a:p>
@@ -1802,7 +1802,7 @@
           <a:p>
             <a:fld id="{97F1F917-F1D2-4368-B437-39ED0419D90A}" type="datetime1">
               <a:rPr lang="en-US" smtClean="0"/>
-              <a:t>4/14/2026</a:t>
+              <a:t>4/15/2026</a:t>
             </a:fld>
             <a:endParaRPr lang="en-US"/>
           </a:p>
@@ -2010,7 +2010,7 @@
           <a:p>
             <a:fld id="{1B27D1D5-455E-457D-8D0F-6A8C6C817D3C}" type="datetime1">
               <a:rPr lang="en-US" smtClean="0"/>
-              <a:t>4/14/2026</a:t>
+              <a:t>4/15/2026</a:t>
             </a:fld>
             <a:endParaRPr lang="en-US"/>
           </a:p>
@@ -2220,7 +2220,7 @@
           <a:p>
             <a:fld id="{EA1EB783-BD1D-45B1-B1CF-F6BB17103F6A}" type="datetime1">
               <a:rPr lang="en-US" smtClean="0"/>
-              <a:t>4/14/2026</a:t>
+              <a:t>4/15/2026</a:t>
             </a:fld>
             <a:endParaRPr lang="en-US"/>
           </a:p>
@@ -2418,7 +2418,7 @@
           <a:p>
             <a:fld id="{AF8AB8F2-353A-4328-902B-9B06FEE5C754}" type="datetime1">
               <a:rPr lang="en-US" smtClean="0"/>
-              <a:t>4/14/2026</a:t>
+              <a:t>4/15/2026</a:t>
             </a:fld>
             <a:endParaRPr lang="en-US"/>
           </a:p>
@@ -2696,7 +2696,7 @@
           <a:p>
             <a:fld id="{485487AD-62F7-470B-B759-97972E7321D1}" type="datetime1">
               <a:rPr lang="en-US" smtClean="0"/>
-              <a:t>4/14/2026</a:t>
+              <a:t>4/15/2026</a:t>
             </a:fld>
             <a:endParaRPr lang="en-US"/>
           </a:p>
@@ -2968,7 +2968,7 @@
           <a:p>
             <a:fld id="{B631FF32-A5EB-4C32-8C2B-8EEDFC04D47B}" type="datetime1">
               <a:rPr lang="en-US" smtClean="0"/>
-              <a:t>4/14/2026</a:t>
+              <a:t>4/15/2026</a:t>
             </a:fld>
             <a:endParaRPr lang="en-US"/>
           </a:p>
@@ -3392,7 +3392,7 @@
           <a:p>
             <a:fld id="{1AEBAB30-FBA6-42BA-A32F-C0FE7795CA04}" type="datetime1">
               <a:rPr lang="en-US" smtClean="0"/>
-              <a:t>4/14/2026</a:t>
+              <a:t>4/15/2026</a:t>
             </a:fld>
             <a:endParaRPr lang="en-US"/>
           </a:p>
@@ -3533,7 +3533,7 @@
           <a:p>
             <a:fld id="{D1AC0BD7-C524-41AC-85A7-2FDDB158F708}" type="datetime1">
               <a:rPr lang="en-US" smtClean="0"/>
-              <a:t>4/14/2026</a:t>
+              <a:t>4/15/2026</a:t>
             </a:fld>
             <a:endParaRPr lang="en-US"/>
           </a:p>
@@ -3646,7 +3646,7 @@
           <a:p>
             <a:fld id="{1F8ABA9B-7E3B-4598-B288-B25DC329D124}" type="datetime1">
               <a:rPr lang="en-US" smtClean="0"/>
-              <a:t>4/14/2026</a:t>
+              <a:t>4/15/2026</a:t>
             </a:fld>
             <a:endParaRPr lang="en-US"/>
           </a:p>
@@ -3965,7 +3965,7 @@
           <a:p>
             <a:fld id="{B8C1C246-3509-4124-8406-573BEC556487}" type="datetime1">
               <a:rPr lang="en-US" smtClean="0"/>
-              <a:t>4/14/2026</a:t>
+              <a:t>4/15/2026</a:t>
             </a:fld>
             <a:endParaRPr lang="en-US"/>
           </a:p>
@@ -4259,7 +4259,7 @@
           <a:p>
             <a:fld id="{CA8B7CE8-0FD0-4622-A7A3-6D131820354D}" type="datetime1">
               <a:rPr lang="en-US" smtClean="0"/>
-              <a:t>4/14/2026</a:t>
+              <a:t>4/15/2026</a:t>
             </a:fld>
             <a:endParaRPr lang="en-US"/>
           </a:p>
@@ -4500,7 +4500,7 @@
           <a:p>
             <a:fld id="{D0B3907D-BD88-4643-B5C3-64FBDE2F82C2}" type="datetime1">
               <a:rPr lang="en-US" smtClean="0"/>
-              <a:t>4/14/2026</a:t>
+              <a:t>4/15/2026</a:t>
             </a:fld>
             <a:endParaRPr lang="en-US"/>
           </a:p>
@@ -6203,7 +6203,7 @@
             <a:fld id="{CC057153-B650-4DEB-B370-79DDCFDCE934}" type="slidenum">
               <a:rPr lang="en-US" smtClean="0"/>
               <a:pPr/>
-              <a:t>2</a:t>
+              <a:t>3</a:t>
             </a:fld>
             <a:endParaRPr lang="en-US" dirty="0"/>
           </a:p>

--- a/SecurePassPresentation.pptx
+++ b/SecurePassPresentation.pptx
@@ -5197,10 +5197,10 @@
           <a:lstStyle/>
           <a:p>
             <a:fld id="{CC057153-B650-4DEB-B370-79DDCFDCE934}" type="slidenum">
-              <a:rPr lang="en-US" smtClean="0"/>
+              <a:rPr lang="en-US" sz="1100" smtClean="0"/>
               <a:t>1</a:t>
             </a:fld>
-            <a:endParaRPr lang="en-US"/>
+            <a:endParaRPr lang="en-US" sz="1100" dirty="0"/>
           </a:p>
         </p:txBody>
       </p:sp>
@@ -5399,14 +5399,14 @@
           <a:lstStyle/>
           <a:p>
             <a:fld id="{CC057153-B650-4DEB-B370-79DDCFDCE934}" type="slidenum">
-              <a:rPr lang="en-US" smtClean="0">
+              <a:rPr lang="en-US" sz="1100" smtClean="0">
                 <a:solidFill>
                   <a:schemeClr val="bg1"/>
                 </a:solidFill>
               </a:rPr>
               <a:t>10</a:t>
             </a:fld>
-            <a:endParaRPr lang="en-US" dirty="0">
+            <a:endParaRPr lang="en-US" sz="1100" dirty="0">
               <a:solidFill>
                 <a:schemeClr val="bg1"/>
               </a:solidFill>
@@ -5609,14 +5609,14 @@
           <a:lstStyle/>
           <a:p>
             <a:fld id="{CC057153-B650-4DEB-B370-79DDCFDCE934}" type="slidenum">
-              <a:rPr lang="en-US" smtClean="0">
+              <a:rPr lang="en-US" sz="1100" smtClean="0">
                 <a:solidFill>
                   <a:schemeClr val="bg1"/>
                 </a:solidFill>
               </a:rPr>
               <a:t>11</a:t>
             </a:fld>
-            <a:endParaRPr lang="en-US" dirty="0">
+            <a:endParaRPr lang="en-US" sz="1100" dirty="0">
               <a:solidFill>
                 <a:schemeClr val="bg1"/>
               </a:solidFill>
@@ -5762,14 +5762,14 @@
           <a:lstStyle/>
           <a:p>
             <a:fld id="{CC057153-B650-4DEB-B370-79DDCFDCE934}" type="slidenum">
-              <a:rPr lang="en-US" smtClean="0">
+              <a:rPr lang="en-US" sz="1100" smtClean="0">
                 <a:solidFill>
                   <a:schemeClr val="bg1"/>
                 </a:solidFill>
               </a:rPr>
               <a:t>12</a:t>
             </a:fld>
-            <a:endParaRPr lang="en-US" dirty="0">
+            <a:endParaRPr lang="en-US" sz="1100" dirty="0">
               <a:solidFill>
                 <a:schemeClr val="bg1"/>
               </a:solidFill>
@@ -5871,7 +5871,7 @@
           <a:lstStyle/>
           <a:p>
             <a:r>
-              <a:rPr lang="en-US" sz="2400" dirty="0">
+              <a:rPr lang="en-US" sz="2800" dirty="0">
                 <a:solidFill>
                   <a:schemeClr val="bg1"/>
                 </a:solidFill>
@@ -5879,7 +5879,7 @@
               <a:t>Weak passwords </a:t>
             </a:r>
             <a:r>
-              <a:rPr lang="en-US" sz="2400" dirty="0">
+              <a:rPr lang="en-US" sz="2800" dirty="0">
                 <a:solidFill>
                   <a:schemeClr val="bg1"/>
                 </a:solidFill>
@@ -5890,7 +5890,7 @@
           </a:p>
           <a:p>
             <a:r>
-              <a:rPr lang="en-US" sz="2400" dirty="0">
+              <a:rPr lang="en-US" sz="2800" dirty="0">
                 <a:solidFill>
                   <a:schemeClr val="bg1"/>
                 </a:solidFill>
@@ -5901,7 +5901,7 @@
           </a:p>
           <a:p>
             <a:r>
-              <a:rPr lang="en-US" sz="2400" dirty="0">
+              <a:rPr lang="en-US" sz="2800" dirty="0">
                 <a:solidFill>
                   <a:schemeClr val="bg1"/>
                 </a:solidFill>
@@ -5912,7 +5912,7 @@
           </a:p>
           <a:p>
             <a:r>
-              <a:rPr lang="en-US" sz="2400" dirty="0">
+              <a:rPr lang="en-US" sz="2800" dirty="0">
                 <a:solidFill>
                   <a:schemeClr val="bg1"/>
                 </a:solidFill>
@@ -5920,7 +5920,7 @@
               </a:rPr>
               <a:t>Local, privacy-focused evaluation</a:t>
             </a:r>
-            <a:endParaRPr lang="en-US" sz="2400" dirty="0">
+            <a:endParaRPr lang="en-US" sz="2800" dirty="0">
               <a:solidFill>
                 <a:schemeClr val="bg1"/>
               </a:solidFill>
@@ -5983,7 +5983,7 @@
           <a:lstStyle/>
           <a:p>
             <a:r>
-              <a:rPr lang="en-US" dirty="0">
+              <a:rPr lang="en-US" sz="1100" dirty="0">
                 <a:solidFill>
                   <a:schemeClr val="bg1"/>
                 </a:solidFill>
@@ -5991,10 +5991,10 @@
               <a:t>2</a:t>
             </a:r>
             <a:fld id="{CC057153-B650-4DEB-B370-79DDCFDCE934}" type="slidenum">
-              <a:rPr lang="en-US" smtClean="0"/>
+              <a:rPr lang="en-US" sz="1100" smtClean="0"/>
               <a:t>2</a:t>
             </a:fld>
-            <a:endParaRPr lang="en-US" dirty="0"/>
+            <a:endParaRPr lang="en-US" sz="1100" dirty="0"/>
           </a:p>
         </p:txBody>
       </p:sp>
@@ -6193,7 +6193,7 @@
           <a:lstStyle/>
           <a:p>
             <a:r>
-              <a:rPr lang="en-US" dirty="0">
+              <a:rPr lang="en-US" sz="1100" dirty="0">
                 <a:solidFill>
                   <a:schemeClr val="bg1"/>
                 </a:solidFill>
@@ -6201,14 +6201,11 @@
               <a:t>3</a:t>
             </a:r>
             <a:fld id="{CC057153-B650-4DEB-B370-79DDCFDCE934}" type="slidenum">
-              <a:rPr lang="en-US" smtClean="0"/>
+              <a:rPr lang="en-US" sz="1100" smtClean="0"/>
               <a:pPr/>
               <a:t>3</a:t>
             </a:fld>
-            <a:endParaRPr lang="en-US" dirty="0"/>
-          </a:p>
-          <a:p>
-            <a:endParaRPr lang="en-US" dirty="0"/>
+            <a:endParaRPr lang="en-US" sz="1100" dirty="0"/>
           </a:p>
         </p:txBody>
       </p:sp>
@@ -6397,14 +6394,14 @@
           <a:lstStyle/>
           <a:p>
             <a:fld id="{CC057153-B650-4DEB-B370-79DDCFDCE934}" type="slidenum">
-              <a:rPr lang="en-US" smtClean="0">
+              <a:rPr lang="en-US" sz="1100" smtClean="0">
                 <a:solidFill>
                   <a:schemeClr val="bg1"/>
                 </a:solidFill>
               </a:rPr>
               <a:t>4</a:t>
             </a:fld>
-            <a:endParaRPr lang="en-US" dirty="0">
+            <a:endParaRPr lang="en-US" sz="1100" dirty="0">
               <a:solidFill>
                 <a:schemeClr val="bg1"/>
               </a:solidFill>
@@ -6550,14 +6547,14 @@
           <a:lstStyle/>
           <a:p>
             <a:fld id="{CC057153-B650-4DEB-B370-79DDCFDCE934}" type="slidenum">
-              <a:rPr lang="en-US" smtClean="0">
+              <a:rPr lang="en-US" sz="1100" smtClean="0">
                 <a:solidFill>
                   <a:schemeClr val="bg1"/>
                 </a:solidFill>
               </a:rPr>
               <a:t>5</a:t>
             </a:fld>
-            <a:endParaRPr lang="en-US" dirty="0">
+            <a:endParaRPr lang="en-US" sz="1100" dirty="0">
               <a:solidFill>
                 <a:schemeClr val="bg1"/>
               </a:solidFill>
@@ -6793,14 +6790,14 @@
           <a:lstStyle/>
           <a:p>
             <a:fld id="{CC057153-B650-4DEB-B370-79DDCFDCE934}" type="slidenum">
-              <a:rPr lang="en-US" smtClean="0">
+              <a:rPr lang="en-US" sz="1100" smtClean="0">
                 <a:solidFill>
                   <a:schemeClr val="bg1"/>
                 </a:solidFill>
               </a:rPr>
               <a:t>6</a:t>
             </a:fld>
-            <a:endParaRPr lang="en-US" dirty="0">
+            <a:endParaRPr lang="en-US" sz="1100" dirty="0">
               <a:solidFill>
                 <a:schemeClr val="bg1"/>
               </a:solidFill>
@@ -7013,14 +7010,14 @@
           <a:lstStyle/>
           <a:p>
             <a:fld id="{CC057153-B650-4DEB-B370-79DDCFDCE934}" type="slidenum">
-              <a:rPr lang="en-US" smtClean="0">
+              <a:rPr lang="en-US" sz="1100" smtClean="0">
                 <a:solidFill>
                   <a:schemeClr val="bg1"/>
                 </a:solidFill>
               </a:rPr>
               <a:t>7</a:t>
             </a:fld>
-            <a:endParaRPr lang="en-US" dirty="0">
+            <a:endParaRPr lang="en-US" sz="1100" dirty="0">
               <a:solidFill>
                 <a:schemeClr val="bg1"/>
               </a:solidFill>
@@ -7028,6 +7025,42 @@
           </a:p>
         </p:txBody>
       </p:sp>
+      <p:pic>
+        <p:nvPicPr>
+          <p:cNvPr id="7" name="Picture 6">
+            <a:extLst>
+              <a:ext uri="{FF2B5EF4-FFF2-40B4-BE49-F238E27FC236}">
+                <a16:creationId xmlns:a16="http://schemas.microsoft.com/office/drawing/2014/main" id="{87E7D7D1-572F-2AF5-5FDA-1EEC00BDCE77}"/>
+              </a:ext>
+            </a:extLst>
+          </p:cNvPr>
+          <p:cNvPicPr>
+            <a:picLocks noChangeAspect="1"/>
+          </p:cNvPicPr>
+          <p:nvPr/>
+        </p:nvPicPr>
+        <p:blipFill>
+          <a:blip r:embed="rId4">
+            <a:extLst>
+              <a:ext uri="{28A0092B-C50C-407E-A947-70E740481C1C}">
+                <a14:useLocalDpi xmlns:a14="http://schemas.microsoft.com/office/drawing/2010/main" val="0"/>
+              </a:ext>
+            </a:extLst>
+          </a:blip>
+          <a:stretch>
+            <a:fillRect/>
+          </a:stretch>
+        </p:blipFill>
+        <p:spPr>
+          <a:xfrm>
+            <a:off x="7116682" y="228153"/>
+            <a:ext cx="4515480" cy="6401693"/>
+          </a:xfrm>
+          <a:prstGeom prst="rect">
+            <a:avLst/>
+          </a:prstGeom>
+        </p:spPr>
+      </p:pic>
     </p:spTree>
     <p:extLst>
       <p:ext uri="{BB962C8B-B14F-4D97-AF65-F5344CB8AC3E}">
@@ -7120,7 +7153,12 @@
             <p:ph idx="1"/>
           </p:nvPr>
         </p:nvSpPr>
-        <p:spPr/>
+        <p:spPr>
+          <a:xfrm>
+            <a:off x="612647" y="1715532"/>
+            <a:ext cx="5339745" cy="4593828"/>
+          </a:xfrm>
+        </p:spPr>
         <p:txBody>
           <a:bodyPr>
             <a:normAutofit/>
@@ -7229,14 +7267,14 @@
           <a:lstStyle/>
           <a:p>
             <a:fld id="{CC057153-B650-4DEB-B370-79DDCFDCE934}" type="slidenum">
-              <a:rPr lang="en-US" smtClean="0">
+              <a:rPr lang="en-US" sz="1100" smtClean="0">
                 <a:solidFill>
                   <a:schemeClr val="bg1"/>
                 </a:solidFill>
               </a:rPr>
               <a:t>8</a:t>
             </a:fld>
-            <a:endParaRPr lang="en-US" dirty="0">
+            <a:endParaRPr lang="en-US" sz="1100" dirty="0">
               <a:solidFill>
                 <a:schemeClr val="bg1"/>
               </a:solidFill>
@@ -7244,6 +7282,42 @@
           </a:p>
         </p:txBody>
       </p:sp>
+      <p:pic>
+        <p:nvPicPr>
+          <p:cNvPr id="9" name="Picture 8">
+            <a:extLst>
+              <a:ext uri="{FF2B5EF4-FFF2-40B4-BE49-F238E27FC236}">
+                <a16:creationId xmlns:a16="http://schemas.microsoft.com/office/drawing/2014/main" id="{6B96407D-8A84-DB11-EF37-378C9A5B6821}"/>
+              </a:ext>
+            </a:extLst>
+          </p:cNvPr>
+          <p:cNvPicPr>
+            <a:picLocks noChangeAspect="1"/>
+          </p:cNvPicPr>
+          <p:nvPr/>
+        </p:nvPicPr>
+        <p:blipFill>
+          <a:blip r:embed="rId4">
+            <a:extLst>
+              <a:ext uri="{28A0092B-C50C-407E-A947-70E740481C1C}">
+                <a14:useLocalDpi xmlns:a14="http://schemas.microsoft.com/office/drawing/2010/main" val="0"/>
+              </a:ext>
+            </a:extLst>
+          </a:blip>
+          <a:stretch>
+            <a:fillRect/>
+          </a:stretch>
+        </p:blipFill>
+        <p:spPr>
+          <a:xfrm>
+            <a:off x="6096000" y="356968"/>
+            <a:ext cx="5677043" cy="5952392"/>
+          </a:xfrm>
+          <a:prstGeom prst="rect">
+            <a:avLst/>
+          </a:prstGeom>
+        </p:spPr>
+      </p:pic>
     </p:spTree>
     <p:extLst>
       <p:ext uri="{BB962C8B-B14F-4D97-AF65-F5344CB8AC3E}">
@@ -7439,14 +7513,14 @@
           <a:lstStyle/>
           <a:p>
             <a:fld id="{CC057153-B650-4DEB-B370-79DDCFDCE934}" type="slidenum">
-              <a:rPr lang="en-US" smtClean="0">
+              <a:rPr lang="en-US" sz="1100" smtClean="0">
                 <a:solidFill>
                   <a:schemeClr val="bg1"/>
                 </a:solidFill>
               </a:rPr>
               <a:t>9</a:t>
             </a:fld>
-            <a:endParaRPr lang="en-US" dirty="0">
+            <a:endParaRPr lang="en-US" sz="1100" dirty="0">
               <a:solidFill>
                 <a:schemeClr val="bg1"/>
               </a:solidFill>

--- a/SecurePassPresentation.pptx
+++ b/SecurePassPresentation.pptx
@@ -715,7 +715,7 @@
           <a:p>
             <a:r>
               <a:rPr lang="en-US" dirty="0"/>
-              <a:t>“Hi, my name is Whitney Carpenter, and this is my Honors Senior Project, SecurePass. It’s a Chrome extension designed to help users create stronger, more secure passwords through real-time feedback and educational insights.”</a:t>
+              <a:t>DON’T FORGET TO DESCRIBE THE PROJECT! “Hi, my name is Whitney Carpenter, and this is my Honors Senior Project, SecurePass. It’s a Chrome extension designed to help users create stronger, more secure passwords through real-time feedback and educational insights.”</a:t>
             </a:r>
           </a:p>
         </p:txBody>
@@ -802,6 +802,99 @@
           <a:p>
             <a:r>
               <a:rPr lang="en-US" dirty="0"/>
+              <a:t>“In the future, this could be expanded with more advanced password analysis techniques, support for other browsers, and additional user controls for history.</a:t>
+            </a:r>
+          </a:p>
+          <a:p>
+            <a:r>
+              <a:rPr lang="en-US" dirty="0"/>
+              <a:t>It could also integrate with breach databases or recommend password managers.”</a:t>
+            </a:r>
+          </a:p>
+        </p:txBody>
+      </p:sp>
+      <p:sp>
+        <p:nvSpPr>
+          <p:cNvPr id="4" name="Slide Number Placeholder 3"/>
+          <p:cNvSpPr>
+            <a:spLocks noGrp="1"/>
+          </p:cNvSpPr>
+          <p:nvPr>
+            <p:ph type="sldNum" sz="quarter" idx="5"/>
+          </p:nvPr>
+        </p:nvSpPr>
+        <p:spPr/>
+        <p:txBody>
+          <a:bodyPr/>
+          <a:lstStyle/>
+          <a:p>
+            <a:fld id="{FD97E8CA-9AD2-4E91-BF9A-88E4C59D9262}" type="slidenum">
+              <a:rPr lang="en-US" smtClean="0"/>
+              <a:t>10</a:t>
+            </a:fld>
+            <a:endParaRPr lang="en-US"/>
+          </a:p>
+        </p:txBody>
+      </p:sp>
+    </p:spTree>
+    <p:extLst>
+      <p:ext uri="{BB962C8B-B14F-4D97-AF65-F5344CB8AC3E}">
+        <p14:creationId xmlns:p14="http://schemas.microsoft.com/office/powerpoint/2010/main" val="1716791234"/>
+      </p:ext>
+    </p:extLst>
+  </p:cSld>
+  <p:clrMapOvr>
+    <a:masterClrMapping/>
+  </p:clrMapOvr>
+</p:notes>
+</file>
+
+<file path=ppt/notesSlides/notesSlide11.xml><?xml version="1.0" encoding="utf-8"?>
+<p:notes xmlns:a="http://schemas.openxmlformats.org/drawingml/2006/main" xmlns:r="http://schemas.openxmlformats.org/officeDocument/2006/relationships" xmlns:p="http://schemas.openxmlformats.org/presentationml/2006/main">
+  <p:cSld>
+    <p:spTree>
+      <p:nvGrpSpPr>
+        <p:cNvPr id="1" name=""/>
+        <p:cNvGrpSpPr/>
+        <p:nvPr/>
+      </p:nvGrpSpPr>
+      <p:grpSpPr>
+        <a:xfrm>
+          <a:off x="0" y="0"/>
+          <a:ext cx="0" cy="0"/>
+          <a:chOff x="0" y="0"/>
+          <a:chExt cx="0" cy="0"/>
+        </a:xfrm>
+      </p:grpSpPr>
+      <p:sp>
+        <p:nvSpPr>
+          <p:cNvPr id="2" name="Slide Image Placeholder 1"/>
+          <p:cNvSpPr>
+            <a:spLocks noGrp="1" noRot="1" noChangeAspect="1"/>
+          </p:cNvSpPr>
+          <p:nvPr>
+            <p:ph type="sldImg"/>
+          </p:nvPr>
+        </p:nvSpPr>
+        <p:spPr/>
+      </p:sp>
+      <p:sp>
+        <p:nvSpPr>
+          <p:cNvPr id="3" name="Notes Placeholder 2"/>
+          <p:cNvSpPr>
+            <a:spLocks noGrp="1"/>
+          </p:cNvSpPr>
+          <p:nvPr>
+            <p:ph type="body" idx="1"/>
+          </p:nvPr>
+        </p:nvSpPr>
+        <p:spPr/>
+        <p:txBody>
+          <a:bodyPr/>
+          <a:lstStyle/>
+          <a:p>
+            <a:r>
+              <a:rPr lang="en-US" dirty="0"/>
               <a:t>“Overall, SecurePass helps users create stronger passwords, improves their understanding of security, and does so in a privacy-focused way.</a:t>
             </a:r>
           </a:p>
@@ -1186,25 +1279,7 @@
           <a:p>
             <a:r>
               <a:rPr lang="en-US" dirty="0"/>
-              <a:t>“The extension is built using a modular architecture.</a:t>
-            </a:r>
-          </a:p>
-          <a:p>
-            <a:r>
-              <a:rPr lang="en-US" dirty="0"/>
-              <a:t>A content script detects password fields and injects the UI, while the popup handles the password evaluation logic.</a:t>
-            </a:r>
-          </a:p>
-          <a:p>
-            <a:r>
-              <a:rPr lang="en-US" dirty="0"/>
-              <a:t>Password strength is calculated using both rule-based scoring and entropy.</a:t>
-            </a:r>
-          </a:p>
-          <a:p>
-            <a:r>
-              <a:rPr lang="en-US" dirty="0"/>
-              <a:t>All processing happens locally, and passwords are hashed using SHA-256, ensuring no sensitive data is stored or transmitted.”</a:t>
+              <a:t>Define entropy (the measure of randomness/unpredictability of the password), and talk about the hash comparison happening for common passwords after full analysis button is clicked.</a:t>
             </a:r>
           </a:p>
         </p:txBody>
@@ -1226,7 +1301,7 @@
           <a:p>
             <a:fld id="{FD97E8CA-9AD2-4E91-BF9A-88E4C59D9262}" type="slidenum">
               <a:rPr lang="en-US" smtClean="0"/>
-              <a:t>6</a:t>
+              <a:t>5</a:t>
             </a:fld>
             <a:endParaRPr lang="en-US"/>
           </a:p>
@@ -1235,7 +1310,7 @@
     </p:spTree>
     <p:extLst>
       <p:ext uri="{BB962C8B-B14F-4D97-AF65-F5344CB8AC3E}">
-        <p14:creationId xmlns:p14="http://schemas.microsoft.com/office/powerpoint/2010/main" val="3552898901"/>
+        <p14:creationId xmlns:p14="http://schemas.microsoft.com/office/powerpoint/2010/main" val="992241727"/>
       </p:ext>
     </p:extLst>
   </p:cSld>
@@ -1291,19 +1366,25 @@
           <a:p>
             <a:r>
               <a:rPr lang="en-US" dirty="0"/>
-              <a:t>“Some key features include real-time feedback, entropy-based scoring, and actionable suggestions.</a:t>
+              <a:t>“The extension is built using a modular architecture.</a:t>
             </a:r>
           </a:p>
           <a:p>
             <a:r>
               <a:rPr lang="en-US" dirty="0"/>
-              <a:t>One important aspect is the educational component—users aren’t just given a score, they’re told why and how to improve.</a:t>
+              <a:t>A content script detects password fields and injects the UI, while the popup handles the password evaluation logic.</a:t>
             </a:r>
           </a:p>
           <a:p>
             <a:r>
               <a:rPr lang="en-US" dirty="0"/>
-              <a:t>And everything is done locally for privacy.”</a:t>
+              <a:t>Password strength is calculated using both rule-based scoring and entropy.</a:t>
+            </a:r>
+          </a:p>
+          <a:p>
+            <a:r>
+              <a:rPr lang="en-US" dirty="0"/>
+              <a:t>All processing happens locally, and passwords are hashed using SHA-256, ensuring no sensitive data is stored or transmitted.”</a:t>
             </a:r>
           </a:p>
         </p:txBody>
@@ -1325,7 +1406,7 @@
           <a:p>
             <a:fld id="{FD97E8CA-9AD2-4E91-BF9A-88E4C59D9262}" type="slidenum">
               <a:rPr lang="en-US" smtClean="0"/>
-              <a:t>7</a:t>
+              <a:t>6</a:t>
             </a:fld>
             <a:endParaRPr lang="en-US"/>
           </a:p>
@@ -1334,7 +1415,7 @@
     </p:spTree>
     <p:extLst>
       <p:ext uri="{BB962C8B-B14F-4D97-AF65-F5344CB8AC3E}">
-        <p14:creationId xmlns:p14="http://schemas.microsoft.com/office/powerpoint/2010/main" val="828944414"/>
+        <p14:creationId xmlns:p14="http://schemas.microsoft.com/office/powerpoint/2010/main" val="3552898901"/>
       </p:ext>
     </p:extLst>
   </p:cSld>
@@ -1390,33 +1471,19 @@
           <a:p>
             <a:r>
               <a:rPr lang="en-US" dirty="0"/>
-              <a:t>“One of the biggest challenges was designing a secure history feature.</a:t>
+              <a:t>“Some key features include real-time feedback, entropy-based scoring, and actionable suggestions.</a:t>
             </a:r>
           </a:p>
           <a:p>
             <a:r>
               <a:rPr lang="en-US" dirty="0"/>
-              <a:t>I had to balance usability with security, and ultimately used hashing so that no plaintext passwords were stored.</a:t>
+              <a:t>One important aspect is the educational component—users aren’t just given a score, they’re told why and how to improve.</a:t>
             </a:r>
           </a:p>
           <a:p>
             <a:r>
               <a:rPr lang="en-US" dirty="0"/>
-              <a:t>Another challenge was handling modern websites that dynamically load content, which I solved using a </a:t>
-            </a:r>
-            <a:r>
-              <a:rPr lang="en-US" dirty="0" err="1"/>
-              <a:t>MutationObserver</a:t>
-            </a:r>
-            <a:r>
-              <a:rPr lang="en-US" dirty="0"/>
-              <a:t>.</a:t>
-            </a:r>
-          </a:p>
-          <a:p>
-            <a:r>
-              <a:rPr lang="en-US" dirty="0"/>
-              <a:t>Preparing the extension for Chrome deployment also introduced additional constraints and validation requirements.”</a:t>
+              <a:t>And everything is done locally for privacy.”</a:t>
             </a:r>
           </a:p>
         </p:txBody>
@@ -1438,7 +1505,7 @@
           <a:p>
             <a:fld id="{FD97E8CA-9AD2-4E91-BF9A-88E4C59D9262}" type="slidenum">
               <a:rPr lang="en-US" smtClean="0"/>
-              <a:t>8</a:t>
+              <a:t>7</a:t>
             </a:fld>
             <a:endParaRPr lang="en-US"/>
           </a:p>
@@ -1447,7 +1514,7 @@
     </p:spTree>
     <p:extLst>
       <p:ext uri="{BB962C8B-B14F-4D97-AF65-F5344CB8AC3E}">
-        <p14:creationId xmlns:p14="http://schemas.microsoft.com/office/powerpoint/2010/main" val="946281071"/>
+        <p14:creationId xmlns:p14="http://schemas.microsoft.com/office/powerpoint/2010/main" val="828944414"/>
       </p:ext>
     </p:extLst>
   </p:cSld>
@@ -1503,19 +1570,33 @@
           <a:p>
             <a:r>
               <a:rPr lang="en-US" dirty="0"/>
-              <a:t>“I decided to use unit tests and acceptance testing for this project, which included 6 users. All unit tests passed successfully, and user testing showed that all participants understood the feedback provided.</a:t>
+              <a:t>“One of the biggest challenges was designing a secure history feature.</a:t>
             </a:r>
           </a:p>
           <a:p>
             <a:r>
               <a:rPr lang="en-US" dirty="0"/>
-              <a:t>The extension consistently responded in under two seconds and generated no network activity, confirming that all processing is local.</a:t>
+              <a:t>I had to balance usability with security, and ultimately used hashing so that no plaintext passwords were stored.</a:t>
             </a:r>
           </a:p>
           <a:p>
             <a:r>
               <a:rPr lang="en-US" dirty="0"/>
-              <a:t>This also demonstrates that the educational requirement was successfully met.”</a:t>
+              <a:t>Another challenge was handling modern websites that dynamically load content, which I solved using a </a:t>
+            </a:r>
+            <a:r>
+              <a:rPr lang="en-US" dirty="0" err="1"/>
+              <a:t>MutationObserver</a:t>
+            </a:r>
+            <a:r>
+              <a:rPr lang="en-US" dirty="0"/>
+              <a:t>.</a:t>
+            </a:r>
+          </a:p>
+          <a:p>
+            <a:r>
+              <a:rPr lang="en-US" dirty="0"/>
+              <a:t>Preparing the extension for Chrome deployment also introduced additional constraints and validation requirements.”</a:t>
             </a:r>
           </a:p>
         </p:txBody>
@@ -1537,7 +1618,7 @@
           <a:p>
             <a:fld id="{FD97E8CA-9AD2-4E91-BF9A-88E4C59D9262}" type="slidenum">
               <a:rPr lang="en-US" smtClean="0"/>
-              <a:t>9</a:t>
+              <a:t>8</a:t>
             </a:fld>
             <a:endParaRPr lang="en-US"/>
           </a:p>
@@ -1546,7 +1627,7 @@
     </p:spTree>
     <p:extLst>
       <p:ext uri="{BB962C8B-B14F-4D97-AF65-F5344CB8AC3E}">
-        <p14:creationId xmlns:p14="http://schemas.microsoft.com/office/powerpoint/2010/main" val="802510623"/>
+        <p14:creationId xmlns:p14="http://schemas.microsoft.com/office/powerpoint/2010/main" val="946281071"/>
       </p:ext>
     </p:extLst>
   </p:cSld>
@@ -1602,13 +1683,19 @@
           <a:p>
             <a:r>
               <a:rPr lang="en-US" dirty="0"/>
-              <a:t>“In the future, this could be expanded with more advanced password analysis techniques, support for other browsers, and additional user controls for history.</a:t>
+              <a:t>“I decided to use unit tests and acceptance testing for this project, which included 6 users. All unit tests passed successfully, and user testing showed that all participants understood the feedback provided.</a:t>
             </a:r>
           </a:p>
           <a:p>
             <a:r>
               <a:rPr lang="en-US" dirty="0"/>
-              <a:t>It could also integrate with breach databases or recommend password managers.”</a:t>
+              <a:t>The extension consistently responded in under two seconds and generated no network activity, confirming that all processing is local.</a:t>
+            </a:r>
+          </a:p>
+          <a:p>
+            <a:r>
+              <a:rPr lang="en-US" dirty="0"/>
+              <a:t>This also demonstrates that the educational requirement was successfully met.”</a:t>
             </a:r>
           </a:p>
         </p:txBody>
@@ -1630,7 +1717,7 @@
           <a:p>
             <a:fld id="{FD97E8CA-9AD2-4E91-BF9A-88E4C59D9262}" type="slidenum">
               <a:rPr lang="en-US" smtClean="0"/>
-              <a:t>10</a:t>
+              <a:t>9</a:t>
             </a:fld>
             <a:endParaRPr lang="en-US"/>
           </a:p>
@@ -1639,7 +1726,7 @@
     </p:spTree>
     <p:extLst>
       <p:ext uri="{BB962C8B-B14F-4D97-AF65-F5344CB8AC3E}">
-        <p14:creationId xmlns:p14="http://schemas.microsoft.com/office/powerpoint/2010/main" val="1716791234"/>
+        <p14:creationId xmlns:p14="http://schemas.microsoft.com/office/powerpoint/2010/main" val="802510623"/>
       </p:ext>
     </p:extLst>
   </p:cSld>
@@ -5686,7 +5773,7 @@
         </p:nvSpPr>
         <p:spPr>
           <a:xfrm>
-            <a:off x="4235604" y="3024051"/>
+            <a:off x="4235604" y="993028"/>
             <a:ext cx="3720792" cy="809898"/>
           </a:xfrm>
         </p:spPr>
@@ -5770,6 +5857,95 @@
               <a:t>12</a:t>
             </a:fld>
             <a:endParaRPr lang="en-US" sz="1100" dirty="0">
+              <a:solidFill>
+                <a:schemeClr val="bg1"/>
+              </a:solidFill>
+            </a:endParaRPr>
+          </a:p>
+        </p:txBody>
+      </p:sp>
+      <p:pic>
+        <p:nvPicPr>
+          <p:cNvPr id="6" name="Picture 5">
+            <a:extLst>
+              <a:ext uri="{FF2B5EF4-FFF2-40B4-BE49-F238E27FC236}">
+                <a16:creationId xmlns:a16="http://schemas.microsoft.com/office/drawing/2014/main" id="{3602BE4E-3D62-274F-7891-D2D437C7F616}"/>
+              </a:ext>
+            </a:extLst>
+          </p:cNvPr>
+          <p:cNvPicPr>
+            <a:picLocks noChangeAspect="1"/>
+          </p:cNvPicPr>
+          <p:nvPr/>
+        </p:nvPicPr>
+        <p:blipFill>
+          <a:blip r:embed="rId3">
+            <a:extLst>
+              <a:ext uri="{28A0092B-C50C-407E-A947-70E740481C1C}">
+                <a14:useLocalDpi xmlns:a14="http://schemas.microsoft.com/office/drawing/2010/main" val="0"/>
+              </a:ext>
+            </a:extLst>
+          </a:blip>
+          <a:stretch>
+            <a:fillRect/>
+          </a:stretch>
+        </p:blipFill>
+        <p:spPr>
+          <a:xfrm>
+            <a:off x="5009351" y="1941755"/>
+            <a:ext cx="2173297" cy="2173297"/>
+          </a:xfrm>
+          <a:prstGeom prst="rect">
+            <a:avLst/>
+          </a:prstGeom>
+        </p:spPr>
+      </p:pic>
+      <p:sp>
+        <p:nvSpPr>
+          <p:cNvPr id="7" name="TextBox 6">
+            <a:extLst>
+              <a:ext uri="{FF2B5EF4-FFF2-40B4-BE49-F238E27FC236}">
+                <a16:creationId xmlns:a16="http://schemas.microsoft.com/office/drawing/2014/main" id="{DC245FD5-D58F-39A1-CA19-BEDEACDB8168}"/>
+              </a:ext>
+            </a:extLst>
+          </p:cNvPr>
+          <p:cNvSpPr txBox="1"/>
+          <p:nvPr/>
+        </p:nvSpPr>
+        <p:spPr>
+          <a:xfrm>
+            <a:off x="5009350" y="4208323"/>
+            <a:ext cx="2173297" cy="369332"/>
+          </a:xfrm>
+          <a:prstGeom prst="rect">
+            <a:avLst/>
+          </a:prstGeom>
+          <a:noFill/>
+        </p:spPr>
+        <p:txBody>
+          <a:bodyPr wrap="square" rtlCol="0">
+            <a:spAutoFit/>
+          </a:bodyPr>
+          <a:lstStyle/>
+          <a:p>
+            <a:pPr algn="ctr"/>
+            <a:r>
+              <a:rPr lang="en-US" dirty="0">
+                <a:solidFill>
+                  <a:schemeClr val="bg1"/>
+                </a:solidFill>
+              </a:rPr>
+              <a:t>Install </a:t>
+            </a:r>
+            <a:r>
+              <a:rPr lang="en-US" dirty="0" err="1">
+                <a:solidFill>
+                  <a:schemeClr val="bg1"/>
+                </a:solidFill>
+              </a:rPr>
+              <a:t>SecurePass</a:t>
+            </a:r>
+            <a:endParaRPr lang="en-US" dirty="0">
               <a:solidFill>
                 <a:schemeClr val="bg1"/>
               </a:solidFill>
@@ -6507,7 +6683,7 @@
           <p:nvPr/>
         </p:nvPicPr>
         <p:blipFill>
-          <a:blip r:embed="rId2">
+          <a:blip r:embed="rId3">
             <a:alphaModFix amt="35000"/>
           </a:blip>
           <a:srcRect t="17695" b="30750"/>
@@ -6704,6 +6880,17 @@
             </a:r>
           </a:p>
           <a:p>
+            <a:pPr lvl="1"/>
+            <a:r>
+              <a:rPr lang="en-US" sz="2200" dirty="0">
+                <a:solidFill>
+                  <a:schemeClr val="bg1"/>
+                </a:solidFill>
+              </a:rPr>
+              <a:t>Justification: stronger security &amp; event-driven service workers</a:t>
+            </a:r>
+          </a:p>
+          <a:p>
             <a:r>
               <a:rPr lang="en-US" sz="2400" dirty="0">
                 <a:solidFill>
@@ -6720,7 +6907,7 @@
                   <a:schemeClr val="bg1"/>
                 </a:solidFill>
               </a:rPr>
-              <a:t>Key components:</a:t>
+              <a:t>Key Components:</a:t>
             </a:r>
           </a:p>
           <a:p>
